--- a/house_price_ml/06_reports/deliverables/Slide_HouseSalePrice.pptx
+++ b/house_price_ml/06_reports/deliverables/Slide_HouseSalePrice.pptx
@@ -4,6 +4,9 @@
   <p:sldMasterIdLst>
     <p:sldMasterId id="2147483648" r:id="rId1"/>
   </p:sldMasterIdLst>
+  <p:notesMasterIdLst>
+    <p:notesMasterId r:id="rId13"/>
+  </p:notesMasterIdLst>
   <p:sldIdLst>
     <p:sldId id="256" r:id="rId2"/>
     <p:sldId id="257" r:id="rId3"/>
@@ -17,9 +20,6 @@
     <p:sldId id="265" r:id="rId11"/>
     <p:sldId id="266" r:id="rId12"/>
   </p:sldIdLst>
-  <p:notesMasterIdLst>
-    <p:notesMasterId r:id="rId13"/>
-  </p:notesMasterIdLst>
   <p:sldSz cx="12192000" cy="6858000"/>
   <p:notesSz cx="6858000" cy="12192000"/>
   <p:defaultTextStyle>
@@ -114,6 +114,11 @@
       </a:defRPr>
     </a:lvl9pPr>
   </p:defaultTextStyle>
+  <p:extLst>
+    <p:ext uri="{EFAFB233-063F-42B5-8137-9DF3F51BA10A}">
+      <p15:sldGuideLst xmlns:p15="http://schemas.microsoft.com/office/powerpoint/2012/main"/>
+    </p:ext>
+  </p:extLst>
 </p:presentation>
 </file>
 
@@ -139,234 +144,10 @@
           <a:chExt cx="0" cy="0"/>
         </a:xfrm>
       </p:grpSpPr>
-      <p:sp>
-        <p:nvSpPr>
-          <p:cNvPr id="2" name="Header Placeholder 1"/>
-          <p:cNvSpPr>
-            <a:spLocks noGrp="1"/>
-          </p:cNvSpPr>
-          <p:nvPr>
-            <p:ph type="hdr" sz="quarter"/>
-          </p:nvPr>
-        </p:nvSpPr>
-        <p:spPr>
-          <a:xfrm>
-            <a:off x="0" y="0"/>
-            <a:ext cx="2971800" cy="458788"/>
-          </a:xfrm>
-          <a:prstGeom prst="rect">
-            <a:avLst/>
-          </a:prstGeom>
-        </p:spPr>
-        <p:txBody>
-          <a:bodyPr vert="horz" lIns="91440" tIns="45720" rIns="91440" bIns="45720" rtlCol="0"/>
-          <a:lstStyle>
-            <a:lvl1pPr algn="l">
-              <a:defRPr sz="1200"/>
-            </a:lvl1pPr>
-          </a:lstStyle>
-          <a:p>
-            <a:endParaRPr lang="en-US"/>
-          </a:p>
-        </p:txBody>
-      </p:sp>
-      <p:sp>
-        <p:nvSpPr>
-          <p:cNvPr id="3" name="Date Placeholder 2"/>
-          <p:cNvSpPr>
-            <a:spLocks noGrp="1"/>
-          </p:cNvSpPr>
-          <p:nvPr>
-            <p:ph type="dt" idx="1"/>
-          </p:nvPr>
-        </p:nvSpPr>
-        <p:spPr>
-          <a:xfrm>
-            <a:off x="3884613" y="0"/>
-            <a:ext cx="2971800" cy="458788"/>
-          </a:xfrm>
-          <a:prstGeom prst="rect">
-            <a:avLst/>
-          </a:prstGeom>
-        </p:spPr>
-        <p:txBody>
-          <a:bodyPr vert="horz" lIns="91440" tIns="45720" rIns="91440" bIns="45720" rtlCol="0"/>
-          <a:lstStyle>
-            <a:lvl1pPr algn="r">
-              <a:defRPr sz="1200"/>
-            </a:lvl1pPr>
-          </a:lstStyle>
-          <a:p>
-            <a:fld id="{5282F153-3F37-0F45-9E97-73ACFA13230C}" type="datetimeFigureOut">
-              <a:rPr lang="en-US"/>
-              <a:t>7/23/19</a:t>
-            </a:fld>
-            <a:endParaRPr lang="en-US"/>
-          </a:p>
-        </p:txBody>
-      </p:sp>
-      <p:sp>
-        <p:nvSpPr>
-          <p:cNvPr id="4" name="Slide Image Placeholder 3"/>
-          <p:cNvSpPr>
-            <a:spLocks noGrp="1" noRot="1" noChangeAspect="1"/>
-          </p:cNvSpPr>
-          <p:nvPr>
-            <p:ph type="sldImg" idx="2"/>
-          </p:nvPr>
-        </p:nvSpPr>
-        <p:spPr>
-          <a:xfrm>
-            <a:off x="685800" y="1143000"/>
-            <a:ext cx="5486400" cy="3086100"/>
-          </a:xfrm>
-          <a:prstGeom prst="rect">
-            <a:avLst/>
-          </a:prstGeom>
-          <a:noFill/>
-          <a:ln w="12700">
-            <a:solidFill>
-              <a:prstClr val="black"/>
-            </a:solidFill>
-          </a:ln>
-        </p:spPr>
-        <p:txBody>
-          <a:bodyPr vert="horz" lIns="91440" tIns="45720" rIns="91440" bIns="45720" rtlCol="0" anchor="ctr"/>
-          <a:lstStyle/>
-          <a:p>
-            <a:endParaRPr lang="en-US"/>
-          </a:p>
-        </p:txBody>
-      </p:sp>
-      <p:sp>
-        <p:nvSpPr>
-          <p:cNvPr id="5" name="Notes Placeholder 4"/>
-          <p:cNvSpPr>
-            <a:spLocks noGrp="1"/>
-          </p:cNvSpPr>
-          <p:nvPr>
-            <p:ph type="body" sz="quarter" idx="3"/>
-          </p:nvPr>
-        </p:nvSpPr>
-        <p:spPr>
-          <a:xfrm>
-            <a:off x="685800" y="4400550"/>
-            <a:ext cx="5486400" cy="3600450"/>
-          </a:xfrm>
-          <a:prstGeom prst="rect">
-            <a:avLst/>
-          </a:prstGeom>
-        </p:spPr>
-        <p:txBody>
-          <a:bodyPr vert="horz" lIns="91440" tIns="45720" rIns="91440" bIns="45720" rtlCol="0"/>
-          <a:lstStyle/>
-          <a:p>
-            <a:pPr lvl="0"/>
-            <a:r>
-              <a:rPr lang="en-US"/>
-              <a:t>Click to edit Master text styles</a:t>
-            </a:r>
-          </a:p>
-          <a:p>
-            <a:pPr lvl="1"/>
-            <a:r>
-              <a:rPr lang="en-US"/>
-              <a:t>Second level</a:t>
-            </a:r>
-          </a:p>
-          <a:p>
-            <a:pPr lvl="2"/>
-            <a:r>
-              <a:rPr lang="en-US"/>
-              <a:t>Third level</a:t>
-            </a:r>
-          </a:p>
-          <a:p>
-            <a:pPr lvl="3"/>
-            <a:r>
-              <a:rPr lang="en-US"/>
-              <a:t>Fourth level</a:t>
-            </a:r>
-          </a:p>
-          <a:p>
-            <a:pPr lvl="4"/>
-            <a:r>
-              <a:rPr lang="en-US"/>
-              <a:t>Fifth level</a:t>
-            </a:r>
-          </a:p>
-        </p:txBody>
-      </p:sp>
-      <p:sp>
-        <p:nvSpPr>
-          <p:cNvPr id="6" name="Footer Placeholder 5"/>
-          <p:cNvSpPr>
-            <a:spLocks noGrp="1"/>
-          </p:cNvSpPr>
-          <p:nvPr>
-            <p:ph type="ftr" sz="quarter" idx="4"/>
-          </p:nvPr>
-        </p:nvSpPr>
-        <p:spPr>
-          <a:xfrm>
-            <a:off x="0" y="8685213"/>
-            <a:ext cx="2971800" cy="458787"/>
-          </a:xfrm>
-          <a:prstGeom prst="rect">
-            <a:avLst/>
-          </a:prstGeom>
-        </p:spPr>
-        <p:txBody>
-          <a:bodyPr vert="horz" lIns="91440" tIns="45720" rIns="91440" bIns="45720" rtlCol="0" anchor="b"/>
-          <a:lstStyle>
-            <a:lvl1pPr algn="l">
-              <a:defRPr sz="1200"/>
-            </a:lvl1pPr>
-          </a:lstStyle>
-          <a:p>
-            <a:endParaRPr lang="en-US"/>
-          </a:p>
-        </p:txBody>
-      </p:sp>
-      <p:sp>
-        <p:nvSpPr>
-          <p:cNvPr id="7" name="Slide Number Placeholder 6"/>
-          <p:cNvSpPr>
-            <a:spLocks noGrp="1"/>
-          </p:cNvSpPr>
-          <p:nvPr>
-            <p:ph type="sldNum" sz="quarter" idx="5"/>
-          </p:nvPr>
-        </p:nvSpPr>
-        <p:spPr>
-          <a:xfrm>
-            <a:off x="3884613" y="8685213"/>
-            <a:ext cx="2971800" cy="458787"/>
-          </a:xfrm>
-          <a:prstGeom prst="rect">
-            <a:avLst/>
-          </a:prstGeom>
-        </p:spPr>
-        <p:txBody>
-          <a:bodyPr vert="horz" lIns="91440" tIns="45720" rIns="91440" bIns="45720" rtlCol="0" anchor="b"/>
-          <a:lstStyle>
-            <a:lvl1pPr algn="r">
-              <a:defRPr sz="1200"/>
-            </a:lvl1pPr>
-          </a:lstStyle>
-          <a:p>
-            <a:fld id="{CE5E9CC1-C706-0F49-92D6-E571CC5EEA8F}" type="slidenum">
-              <a:rPr lang="en-US"/>
-              <a:t>‹#›</a:t>
-            </a:fld>
-            <a:endParaRPr lang="en-US"/>
-          </a:p>
-        </p:txBody>
-      </p:sp>
     </p:spTree>
     <p:extLst>
       <p:ext uri="{BB962C8B-B14F-4D97-AF65-F5344CB8AC3E}">
-        <p14:creationId xmlns:p14="http://schemas.microsoft.com/office/powerpoint/2010/main" val="1024086991"/>
+        <p14:creationId xmlns:p14="http://schemas.microsoft.com/office/powerpoint/2010/main" val="1077304579"/>
       </p:ext>
     </p:extLst>
   </p:cSld>
@@ -510,10 +291,6 @@
           <a:bodyPr/>
           <a:lstStyle/>
           <a:p>
-            <a:r>
-              <a:rPr lang="en-US" dirty="0"/>
-              <a:t/>
-            </a:r>
             <a:endParaRPr lang="en-US" dirty="0"/>
           </a:p>
         </p:txBody>
@@ -598,10 +375,6 @@
           <a:bodyPr/>
           <a:lstStyle/>
           <a:p>
-            <a:r>
-              <a:rPr lang="en-US" dirty="0"/>
-              <a:t/>
-            </a:r>
             <a:endParaRPr lang="en-US" dirty="0"/>
           </a:p>
         </p:txBody>
@@ -686,10 +459,6 @@
           <a:bodyPr/>
           <a:lstStyle/>
           <a:p>
-            <a:r>
-              <a:rPr lang="en-US" dirty="0"/>
-              <a:t/>
-            </a:r>
             <a:endParaRPr lang="en-US" dirty="0"/>
           </a:p>
         </p:txBody>
@@ -774,10 +543,6 @@
           <a:bodyPr/>
           <a:lstStyle/>
           <a:p>
-            <a:r>
-              <a:rPr lang="en-US" dirty="0"/>
-              <a:t/>
-            </a:r>
             <a:endParaRPr lang="en-US" dirty="0"/>
           </a:p>
         </p:txBody>
@@ -862,10 +627,6 @@
           <a:bodyPr/>
           <a:lstStyle/>
           <a:p>
-            <a:r>
-              <a:rPr lang="en-US" dirty="0"/>
-              <a:t/>
-            </a:r>
             <a:endParaRPr lang="en-US" dirty="0"/>
           </a:p>
         </p:txBody>
@@ -950,10 +711,6 @@
           <a:bodyPr/>
           <a:lstStyle/>
           <a:p>
-            <a:r>
-              <a:rPr lang="en-US" dirty="0"/>
-              <a:t/>
-            </a:r>
             <a:endParaRPr lang="en-US" dirty="0"/>
           </a:p>
         </p:txBody>
@@ -1038,10 +795,6 @@
           <a:bodyPr/>
           <a:lstStyle/>
           <a:p>
-            <a:r>
-              <a:rPr lang="en-US" dirty="0"/>
-              <a:t/>
-            </a:r>
             <a:endParaRPr lang="en-US" dirty="0"/>
           </a:p>
         </p:txBody>
@@ -1126,10 +879,6 @@
           <a:bodyPr/>
           <a:lstStyle/>
           <a:p>
-            <a:r>
-              <a:rPr lang="en-US" dirty="0"/>
-              <a:t/>
-            </a:r>
             <a:endParaRPr lang="en-US" dirty="0"/>
           </a:p>
         </p:txBody>
@@ -1214,10 +963,6 @@
           <a:bodyPr/>
           <a:lstStyle/>
           <a:p>
-            <a:r>
-              <a:rPr lang="en-US" dirty="0"/>
-              <a:t/>
-            </a:r>
             <a:endParaRPr lang="en-US" dirty="0"/>
           </a:p>
         </p:txBody>
@@ -1302,10 +1047,6 @@
           <a:bodyPr/>
           <a:lstStyle/>
           <a:p>
-            <a:r>
-              <a:rPr lang="en-US" dirty="0"/>
-              <a:t/>
-            </a:r>
             <a:endParaRPr lang="en-US" dirty="0"/>
           </a:p>
         </p:txBody>
@@ -1390,10 +1131,6 @@
           <a:bodyPr/>
           <a:lstStyle/>
           <a:p>
-            <a:r>
-              <a:rPr lang="en-US" dirty="0"/>
-              <a:t/>
-            </a:r>
             <a:endParaRPr lang="en-US" dirty="0"/>
           </a:p>
         </p:txBody>
@@ -1467,6 +1204,11 @@
 <file path=ppt/slideMasters/slideMaster1.xml><?xml version="1.0" encoding="utf-8"?>
 <p:sldMaster xmlns:a="http://schemas.openxmlformats.org/drawingml/2006/main" xmlns:r="http://schemas.openxmlformats.org/officeDocument/2006/relationships" xmlns:p="http://schemas.openxmlformats.org/presentationml/2006/main">
   <p:cSld>
+    <p:bg>
+      <p:bgRef idx="1001">
+        <a:schemeClr val="bg1"/>
+      </p:bgRef>
+    </p:bg>
     <p:spTree>
       <p:nvGrpSpPr>
         <p:cNvPr id="1" name=""/>
@@ -1749,6 +1491,7 @@
         <a:solidFill>
           <a:srgbClr val="0E5C4A"/>
         </a:solidFill>
+        <a:effectLst/>
       </p:bgPr>
     </p:bg>
     <p:spTree>
@@ -1926,7 +1669,7 @@
           <a:bodyPr wrap="square" rtlCol="0" anchor="ctr"/>
           <a:lstStyle/>
           <a:p>
-            <a:pPr indent="0" marL="0">
+            <a:pPr marL="0" indent="0">
               <a:buNone/>
             </a:pPr>
             <a:r>
@@ -1965,7 +1708,7 @@
           <a:bodyPr wrap="square" rtlCol="0" anchor="ctr"/>
           <a:lstStyle/>
           <a:p>
-            <a:pPr indent="0" marL="0">
+            <a:pPr marL="0" indent="0">
               <a:buNone/>
             </a:pPr>
             <a:r>
@@ -2027,7 +1770,7 @@
           <a:bodyPr wrap="square" rtlCol="0" anchor="ctr"/>
           <a:lstStyle/>
           <a:p>
-            <a:pPr indent="0" marL="0">
+            <a:pPr marL="0" indent="0">
               <a:buNone/>
             </a:pPr>
             <a:r>
@@ -2063,7 +1806,7 @@
           <a:bodyPr wrap="square" rtlCol="0" anchor="ctr"/>
           <a:lstStyle/>
           <a:p>
-            <a:pPr indent="0" marL="0">
+            <a:pPr marL="0" indent="0">
               <a:buNone/>
             </a:pPr>
             <a:r>
@@ -2094,6 +1837,7 @@
         <a:solidFill>
           <a:srgbClr val="FBF7EE"/>
         </a:solidFill>
+        <a:effectLst/>
       </p:bgPr>
     </p:bg>
     <p:spTree>
@@ -2151,7 +1895,7 @@
           <a:bodyPr wrap="square" rtlCol="0" anchor="ctr"/>
           <a:lstStyle/>
           <a:p>
-            <a:pPr indent="0" marL="0">
+            <a:pPr marL="0" indent="0">
               <a:buNone/>
             </a:pPr>
             <a:r>
@@ -2237,7 +1981,7 @@
           <a:bodyPr wrap="square" rtlCol="0" anchor="ctr"/>
           <a:lstStyle/>
           <a:p>
-            <a:pPr indent="0" marL="0">
+            <a:pPr marL="0" indent="0">
               <a:buNone/>
             </a:pPr>
             <a:r>
@@ -2248,9 +1992,6 @@
               </a:rPr>
               <a:t>6/10 </a:t>
             </a:r>
-            <a:pPr indent="0" marL="0">
-              <a:buNone/>
-            </a:pPr>
             <a:r>
               <a:rPr lang="en-US" sz="1500" dirty="0">
                 <a:solidFill>
@@ -2260,9 +2001,6 @@
               <a:t>dự đoán sai nhiều nhất trên val đều có SaleCondition ≠ Normal (Abnorml/Partial)
 </a:t>
             </a:r>
-            <a:pPr indent="0" marL="0">
-              <a:buNone/>
-            </a:pPr>
             <a:r>
               <a:rPr lang="en-US" sz="1350" i="1" dirty="0">
                 <a:solidFill>
@@ -2316,7 +2054,7 @@
           <a:bodyPr wrap="square" rtlCol="0" anchor="ctr"/>
           <a:lstStyle/>
           <a:p>
-            <a:pPr algn="ctr" indent="0" marL="0">
+            <a:pPr marL="0" indent="0" algn="ctr">
               <a:buNone/>
             </a:pPr>
             <a:r>
@@ -2352,7 +2090,7 @@
           <a:bodyPr wrap="square" rtlCol="0" anchor="ctr"/>
           <a:lstStyle/>
           <a:p>
-            <a:pPr indent="0" marL="0">
+            <a:pPr marL="0" indent="0">
               <a:buNone/>
             </a:pPr>
             <a:r>
@@ -2388,7 +2126,7 @@
           <a:bodyPr wrap="square" rtlCol="0" anchor="ctr"/>
           <a:lstStyle/>
           <a:p>
-            <a:pPr indent="0" marL="0">
+            <a:pPr marL="0" indent="0">
               <a:buNone/>
             </a:pPr>
             <a:r>
@@ -2444,7 +2182,7 @@
           <a:bodyPr wrap="square" rtlCol="0" anchor="ctr"/>
           <a:lstStyle/>
           <a:p>
-            <a:pPr algn="ctr" indent="0" marL="0">
+            <a:pPr marL="0" indent="0" algn="ctr">
               <a:buNone/>
             </a:pPr>
             <a:r>
@@ -2480,7 +2218,7 @@
           <a:bodyPr wrap="square" rtlCol="0" anchor="ctr"/>
           <a:lstStyle/>
           <a:p>
-            <a:pPr indent="0" marL="0">
+            <a:pPr marL="0" indent="0">
               <a:buNone/>
             </a:pPr>
             <a:r>
@@ -2516,7 +2254,7 @@
           <a:bodyPr wrap="square" rtlCol="0" anchor="ctr"/>
           <a:lstStyle/>
           <a:p>
-            <a:pPr indent="0" marL="0">
+            <a:pPr marL="0" indent="0">
               <a:buNone/>
             </a:pPr>
             <a:r>
@@ -2572,7 +2310,7 @@
           <a:bodyPr wrap="square" rtlCol="0" anchor="ctr"/>
           <a:lstStyle/>
           <a:p>
-            <a:pPr algn="ctr" indent="0" marL="0">
+            <a:pPr marL="0" indent="0" algn="ctr">
               <a:buNone/>
             </a:pPr>
             <a:r>
@@ -2608,7 +2346,7 @@
           <a:bodyPr wrap="square" rtlCol="0" anchor="ctr"/>
           <a:lstStyle/>
           <a:p>
-            <a:pPr indent="0" marL="0">
+            <a:pPr marL="0" indent="0">
               <a:buNone/>
             </a:pPr>
             <a:r>
@@ -2644,7 +2382,7 @@
           <a:bodyPr wrap="square" rtlCol="0" anchor="ctr"/>
           <a:lstStyle/>
           <a:p>
-            <a:pPr indent="0" marL="0">
+            <a:pPr marL="0" indent="0">
               <a:buNone/>
             </a:pPr>
             <a:r>
@@ -2680,7 +2418,7 @@
           <a:bodyPr wrap="square" rtlCol="0" anchor="ctr"/>
           <a:lstStyle/>
           <a:p>
-            <a:pPr algn="r" indent="0" marL="0">
+            <a:pPr marL="0" indent="0" algn="r">
               <a:buNone/>
             </a:pPr>
             <a:r>
@@ -2711,6 +2449,7 @@
         <a:solidFill>
           <a:srgbClr val="FBF7EE"/>
         </a:solidFill>
+        <a:effectLst/>
       </p:bgPr>
     </p:bg>
     <p:spTree>
@@ -2768,7 +2507,7 @@
           <a:bodyPr wrap="square" rtlCol="0" anchor="ctr"/>
           <a:lstStyle/>
           <a:p>
-            <a:pPr indent="0" marL="0">
+            <a:pPr marL="0" indent="0">
               <a:buNone/>
             </a:pPr>
             <a:r>
@@ -2827,7 +2566,7 @@
           <a:bodyPr wrap="square" rtlCol="0" anchor="ctr"/>
           <a:lstStyle/>
           <a:p>
-            <a:pPr indent="0" marL="0">
+            <a:pPr marL="0" indent="0">
               <a:lnSpc>
                 <a:spcPct val="130000"/>
               </a:lnSpc>
@@ -2841,12 +2580,6 @@
               </a:rPr>
               <a:t>✔ </a:t>
             </a:r>
-            <a:pPr indent="0" marL="0">
-              <a:lnSpc>
-                <a:spcPct val="130000"/>
-              </a:lnSpc>
-              <a:buNone/>
-            </a:pPr>
             <a:r>
               <a:rPr lang="en-US" sz="1550" dirty="0">
                 <a:solidFill>
@@ -2856,12 +2589,6 @@
               <a:t>Xây dựng thành công pipeline dự đoán giá nhà với kiểm soát rò rỉ nghiêm ngặt qua toàn bộ vòng đời dữ liệu
 </a:t>
             </a:r>
-            <a:pPr indent="0" marL="0">
-              <a:lnSpc>
-                <a:spcPct val="130000"/>
-              </a:lnSpc>
-              <a:buNone/>
-            </a:pPr>
             <a:r>
               <a:rPr lang="en-US" sz="1600" b="1" dirty="0">
                 <a:solidFill>
@@ -2870,12 +2597,6 @@
               </a:rPr>
               <a:t>✔ </a:t>
             </a:r>
-            <a:pPr indent="0" marL="0">
-              <a:lnSpc>
-                <a:spcPct val="130000"/>
-              </a:lnSpc>
-              <a:buNone/>
-            </a:pPr>
             <a:r>
               <a:rPr lang="en-US" sz="1550" dirty="0">
                 <a:solidFill>
@@ -2885,12 +2606,6 @@
               <a:t>Ridge Regression vượt trội XGBoost (kể cả đã tune) trên dữ liệu bảng quy mô nhỏ — hệ số ổn định, diễn giải được
 </a:t>
             </a:r>
-            <a:pPr indent="0" marL="0">
-              <a:lnSpc>
-                <a:spcPct val="130000"/>
-              </a:lnSpc>
-              <a:buNone/>
-            </a:pPr>
             <a:r>
               <a:rPr lang="en-US" sz="1600" b="1" dirty="0">
                 <a:solidFill>
@@ -2899,12 +2614,6 @@
               </a:rPr>
               <a:t>✔ </a:t>
             </a:r>
-            <a:pPr indent="0" marL="0">
-              <a:lnSpc>
-                <a:spcPct val="130000"/>
-              </a:lnSpc>
-              <a:buNone/>
-            </a:pPr>
             <a:r>
               <a:rPr lang="en-US" sz="1550" dirty="0">
                 <a:solidFill>
@@ -2914,12 +2623,6 @@
               <a:t>RMSLE test = 0.1301, giảm 68% so với baseline
 </a:t>
             </a:r>
-            <a:pPr indent="0" marL="0">
-              <a:lnSpc>
-                <a:spcPct val="130000"/>
-              </a:lnSpc>
-              <a:buNone/>
-            </a:pPr>
             <a:r>
               <a:rPr lang="en-US" sz="1550" b="1" dirty="0">
                 <a:solidFill>
@@ -2928,12 +2631,6 @@
               </a:rPr>
               <a:t>→ Hướng phát triển: </a:t>
             </a:r>
-            <a:pPr indent="0" marL="0">
-              <a:lnSpc>
-                <a:spcPct val="130000"/>
-              </a:lnSpc>
-              <a:buNone/>
-            </a:pPr>
             <a:r>
               <a:rPr lang="en-US" sz="1550" dirty="0">
                 <a:solidFill>
@@ -2990,7 +2687,7 @@
           <a:bodyPr wrap="square" rtlCol="0" anchor="ctr"/>
           <a:lstStyle/>
           <a:p>
-            <a:pPr algn="ctr" indent="0" marL="0">
+            <a:pPr marL="0" indent="0" algn="ctr">
               <a:buNone/>
             </a:pPr>
             <a:r>
@@ -3026,7 +2723,7 @@
           <a:bodyPr wrap="square" rtlCol="0" anchor="ctr"/>
           <a:lstStyle/>
           <a:p>
-            <a:pPr algn="r" indent="0" marL="0">
+            <a:pPr marL="0" indent="0" algn="r">
               <a:buNone/>
             </a:pPr>
             <a:r>
@@ -3057,6 +2754,7 @@
         <a:solidFill>
           <a:srgbClr val="FBF7EE"/>
         </a:solidFill>
+        <a:effectLst/>
       </p:bgPr>
     </p:bg>
     <p:spTree>
@@ -3114,7 +2812,7 @@
           <a:bodyPr wrap="square" rtlCol="0" anchor="ctr"/>
           <a:lstStyle/>
           <a:p>
-            <a:pPr indent="0" marL="0">
+            <a:pPr marL="0" indent="0">
               <a:buNone/>
             </a:pPr>
             <a:r>
@@ -3220,7 +2918,7 @@
           <a:bodyPr wrap="square" rtlCol="0" anchor="ctr"/>
           <a:lstStyle/>
           <a:p>
-            <a:pPr algn="ctr" indent="0" marL="0">
+            <a:pPr marL="0" indent="0" algn="ctr">
               <a:buNone/>
             </a:pPr>
             <a:r>
@@ -3256,7 +2954,7 @@
           <a:bodyPr wrap="square" lIns="0" tIns="0" rIns="0" bIns="0" rtlCol="0" anchor="ctr"/>
           <a:lstStyle/>
           <a:p>
-            <a:pPr indent="0" marL="0">
+            <a:pPr marL="0" indent="0">
               <a:buNone/>
             </a:pPr>
             <a:r>
@@ -3339,7 +3037,7 @@
           <a:bodyPr wrap="square" rtlCol="0" anchor="ctr"/>
           <a:lstStyle/>
           <a:p>
-            <a:pPr algn="ctr" indent="0" marL="0">
+            <a:pPr marL="0" indent="0" algn="ctr">
               <a:buNone/>
             </a:pPr>
             <a:r>
@@ -3375,7 +3073,7 @@
           <a:bodyPr wrap="square" lIns="0" tIns="0" rIns="0" bIns="0" rtlCol="0" anchor="ctr"/>
           <a:lstStyle/>
           <a:p>
-            <a:pPr indent="0" marL="0">
+            <a:pPr marL="0" indent="0">
               <a:buNone/>
             </a:pPr>
             <a:r>
@@ -3458,7 +3156,7 @@
           <a:bodyPr wrap="square" rtlCol="0" anchor="ctr"/>
           <a:lstStyle/>
           <a:p>
-            <a:pPr algn="ctr" indent="0" marL="0">
+            <a:pPr marL="0" indent="0" algn="ctr">
               <a:buNone/>
             </a:pPr>
             <a:r>
@@ -3494,7 +3192,7 @@
           <a:bodyPr wrap="square" lIns="0" tIns="0" rIns="0" bIns="0" rtlCol="0" anchor="ctr"/>
           <a:lstStyle/>
           <a:p>
-            <a:pPr indent="0" marL="0">
+            <a:pPr marL="0" indent="0">
               <a:buNone/>
             </a:pPr>
             <a:r>
@@ -3577,7 +3275,7 @@
           <a:bodyPr wrap="square" rtlCol="0" anchor="ctr"/>
           <a:lstStyle/>
           <a:p>
-            <a:pPr algn="ctr" indent="0" marL="0">
+            <a:pPr marL="0" indent="0" algn="ctr">
               <a:buNone/>
             </a:pPr>
             <a:r>
@@ -3613,7 +3311,7 @@
           <a:bodyPr wrap="square" lIns="0" tIns="0" rIns="0" bIns="0" rtlCol="0" anchor="ctr"/>
           <a:lstStyle/>
           <a:p>
-            <a:pPr indent="0" marL="0">
+            <a:pPr marL="0" indent="0">
               <a:buNone/>
             </a:pPr>
             <a:r>
@@ -3696,7 +3394,7 @@
           <a:bodyPr wrap="square" rtlCol="0" anchor="ctr"/>
           <a:lstStyle/>
           <a:p>
-            <a:pPr algn="ctr" indent="0" marL="0">
+            <a:pPr marL="0" indent="0" algn="ctr">
               <a:buNone/>
             </a:pPr>
             <a:r>
@@ -3732,7 +3430,7 @@
           <a:bodyPr wrap="square" lIns="0" tIns="0" rIns="0" bIns="0" rtlCol="0" anchor="ctr"/>
           <a:lstStyle/>
           <a:p>
-            <a:pPr indent="0" marL="0">
+            <a:pPr marL="0" indent="0">
               <a:buNone/>
             </a:pPr>
             <a:r>
@@ -3815,7 +3513,7 @@
           <a:bodyPr wrap="square" rtlCol="0" anchor="ctr"/>
           <a:lstStyle/>
           <a:p>
-            <a:pPr algn="ctr" indent="0" marL="0">
+            <a:pPr marL="0" indent="0" algn="ctr">
               <a:buNone/>
             </a:pPr>
             <a:r>
@@ -3851,7 +3549,7 @@
           <a:bodyPr wrap="square" lIns="0" tIns="0" rIns="0" bIns="0" rtlCol="0" anchor="ctr"/>
           <a:lstStyle/>
           <a:p>
-            <a:pPr indent="0" marL="0">
+            <a:pPr marL="0" indent="0">
               <a:buNone/>
             </a:pPr>
             <a:r>
@@ -3934,7 +3632,7 @@
           <a:bodyPr wrap="square" rtlCol="0" anchor="ctr"/>
           <a:lstStyle/>
           <a:p>
-            <a:pPr algn="ctr" indent="0" marL="0">
+            <a:pPr marL="0" indent="0" algn="ctr">
               <a:buNone/>
             </a:pPr>
             <a:r>
@@ -3970,7 +3668,7 @@
           <a:bodyPr wrap="square" lIns="0" tIns="0" rIns="0" bIns="0" rtlCol="0" anchor="ctr"/>
           <a:lstStyle/>
           <a:p>
-            <a:pPr indent="0" marL="0">
+            <a:pPr marL="0" indent="0">
               <a:buNone/>
             </a:pPr>
             <a:r>
@@ -4053,7 +3751,7 @@
           <a:bodyPr wrap="square" rtlCol="0" anchor="ctr"/>
           <a:lstStyle/>
           <a:p>
-            <a:pPr algn="ctr" indent="0" marL="0">
+            <a:pPr marL="0" indent="0" algn="ctr">
               <a:buNone/>
             </a:pPr>
             <a:r>
@@ -4089,7 +3787,7 @@
           <a:bodyPr wrap="square" lIns="0" tIns="0" rIns="0" bIns="0" rtlCol="0" anchor="ctr"/>
           <a:lstStyle/>
           <a:p>
-            <a:pPr indent="0" marL="0">
+            <a:pPr marL="0" indent="0">
               <a:buNone/>
             </a:pPr>
             <a:r>
@@ -4172,7 +3870,7 @@
           <a:bodyPr wrap="square" rtlCol="0" anchor="ctr"/>
           <a:lstStyle/>
           <a:p>
-            <a:pPr algn="ctr" indent="0" marL="0">
+            <a:pPr marL="0" indent="0" algn="ctr">
               <a:buNone/>
             </a:pPr>
             <a:r>
@@ -4208,7 +3906,7 @@
           <a:bodyPr wrap="square" lIns="0" tIns="0" rIns="0" bIns="0" rtlCol="0" anchor="ctr"/>
           <a:lstStyle/>
           <a:p>
-            <a:pPr indent="0" marL="0">
+            <a:pPr marL="0" indent="0">
               <a:buNone/>
             </a:pPr>
             <a:r>
@@ -4244,7 +3942,7 @@
           <a:bodyPr wrap="square" rtlCol="0" anchor="ctr"/>
           <a:lstStyle/>
           <a:p>
-            <a:pPr algn="r" indent="0" marL="0">
+            <a:pPr marL="0" indent="0" algn="r">
               <a:buNone/>
             </a:pPr>
             <a:r>
@@ -4275,6 +3973,7 @@
         <a:solidFill>
           <a:srgbClr val="FBF7EE"/>
         </a:solidFill>
+        <a:effectLst/>
       </p:bgPr>
     </p:bg>
     <p:spTree>
@@ -4332,7 +4031,7 @@
           <a:bodyPr wrap="square" rtlCol="0" anchor="ctr"/>
           <a:lstStyle/>
           <a:p>
-            <a:pPr indent="0" marL="0">
+            <a:pPr marL="0" indent="0">
               <a:buNone/>
             </a:pPr>
             <a:r>
@@ -4391,7 +4090,7 @@
           <a:bodyPr wrap="square" rtlCol="0" anchor="ctr"/>
           <a:lstStyle/>
           <a:p>
-            <a:pPr indent="0" marL="0">
+            <a:pPr marL="0" indent="0">
               <a:lnSpc>
                 <a:spcPct val="130000"/>
               </a:lnSpc>
@@ -4405,12 +4104,6 @@
               </a:rPr>
               <a:t>Bài toán: </a:t>
             </a:r>
-            <a:pPr indent="0" marL="0">
-              <a:lnSpc>
-                <a:spcPct val="130000"/>
-              </a:lnSpc>
-              <a:buNone/>
-            </a:pPr>
             <a:r>
               <a:rPr lang="en-US" sz="1600" dirty="0">
                 <a:solidFill>
@@ -4420,12 +4113,6 @@
               <a:t>Dự đoán giá bán nhà (SalePrice) từ đặc điểm căn nhà — hồi quy trên dữ liệu bảng.
 </a:t>
             </a:r>
-            <a:pPr indent="0" marL="0">
-              <a:lnSpc>
-                <a:spcPct val="130000"/>
-              </a:lnSpc>
-              <a:buNone/>
-            </a:pPr>
             <a:r>
               <a:rPr lang="en-US" sz="1600" b="1" dirty="0">
                 <a:solidFill>
@@ -4434,12 +4121,6 @@
               </a:rPr>
               <a:t>Vì sao quan trọng: </a:t>
             </a:r>
-            <a:pPr indent="0" marL="0">
-              <a:lnSpc>
-                <a:spcPct val="130000"/>
-              </a:lnSpc>
-              <a:buNone/>
-            </a:pPr>
             <a:r>
               <a:rPr lang="en-US" sz="1600" dirty="0">
                 <a:solidFill>
@@ -4449,12 +4130,6 @@
               <a:t>Định giá bất động sản ảnh hưởng người mua, người bán, tổ chức tín dụng.
 </a:t>
             </a:r>
-            <a:pPr indent="0" marL="0">
-              <a:lnSpc>
-                <a:spcPct val="130000"/>
-              </a:lnSpc>
-              <a:buNone/>
-            </a:pPr>
             <a:r>
               <a:rPr lang="en-US" sz="1600" b="1" dirty="0">
                 <a:solidFill>
@@ -4463,12 +4138,6 @@
               </a:rPr>
               <a:t>Bộ dữ liệu: </a:t>
             </a:r>
-            <a:pPr indent="0" marL="0">
-              <a:lnSpc>
-                <a:spcPct val="130000"/>
-              </a:lnSpc>
-              <a:buNone/>
-            </a:pPr>
             <a:r>
               <a:rPr lang="en-US" sz="1600" dirty="0">
                 <a:solidFill>
@@ -4478,12 +4147,6 @@
               <a:t>Ames Housing (Kaggle House Prices) — 1460 căn nhà, 79 đặc trưng, Ames, Iowa (2006–2010).
 </a:t>
             </a:r>
-            <a:pPr indent="0" marL="0">
-              <a:lnSpc>
-                <a:spcPct val="130000"/>
-              </a:lnSpc>
-              <a:buNone/>
-            </a:pPr>
             <a:r>
               <a:rPr lang="en-US" sz="1600" b="1" dirty="0">
                 <a:solidFill>
@@ -4504,7 +4167,7 @@
         </p:nvSpPr>
         <p:spPr>
           <a:xfrm>
-            <a:off x="731520" y="4343400"/>
+            <a:off x="731520" y="5109210"/>
             <a:ext cx="274320" cy="274320"/>
           </a:xfrm>
           <a:prstGeom prst="roundRect">
@@ -4526,7 +4189,7 @@
         </p:nvSpPr>
         <p:spPr>
           <a:xfrm>
-            <a:off x="1143000" y="4279392"/>
+            <a:off x="1143000" y="5040630"/>
             <a:ext cx="5943600" cy="411480"/>
           </a:xfrm>
           <a:prstGeom prst="rect">
@@ -4539,7 +4202,7 @@
           <a:bodyPr wrap="square" rtlCol="0" anchor="ctr"/>
           <a:lstStyle/>
           <a:p>
-            <a:pPr indent="0" marL="0">
+            <a:pPr marL="0" indent="0">
               <a:buNone/>
             </a:pPr>
             <a:r>
@@ -4562,7 +4225,7 @@
         </p:nvSpPr>
         <p:spPr>
           <a:xfrm>
-            <a:off x="731520" y="4846320"/>
+            <a:off x="731520" y="5623560"/>
             <a:ext cx="274320" cy="274320"/>
           </a:xfrm>
           <a:prstGeom prst="roundRect">
@@ -4584,7 +4247,7 @@
         </p:nvSpPr>
         <p:spPr>
           <a:xfrm>
-            <a:off x="1143000" y="4782312"/>
+            <a:off x="1143000" y="5554980"/>
             <a:ext cx="5943600" cy="411480"/>
           </a:xfrm>
           <a:prstGeom prst="rect">
@@ -4597,7 +4260,7 @@
           <a:bodyPr wrap="square" rtlCol="0" anchor="ctr"/>
           <a:lstStyle/>
           <a:p>
-            <a:pPr indent="0" marL="0">
+            <a:pPr marL="0" indent="0">
               <a:buNone/>
             </a:pPr>
             <a:r>
@@ -4620,7 +4283,7 @@
         </p:nvSpPr>
         <p:spPr>
           <a:xfrm>
-            <a:off x="731520" y="5349240"/>
+            <a:off x="731520" y="6124278"/>
             <a:ext cx="274320" cy="274320"/>
           </a:xfrm>
           <a:prstGeom prst="roundRect">
@@ -4642,7 +4305,7 @@
         </p:nvSpPr>
         <p:spPr>
           <a:xfrm>
-            <a:off x="1143000" y="5285232"/>
+            <a:off x="1143000" y="6055698"/>
             <a:ext cx="5943600" cy="411480"/>
           </a:xfrm>
           <a:prstGeom prst="rect">
@@ -4655,7 +4318,7 @@
           <a:bodyPr wrap="square" rtlCol="0" anchor="ctr"/>
           <a:lstStyle/>
           <a:p>
-            <a:pPr indent="0" marL="0">
+            <a:pPr marL="0" indent="0">
               <a:buNone/>
             </a:pPr>
             <a:r>
@@ -4672,14 +4335,14 @@
       </p:sp>
       <p:pic>
         <p:nvPicPr>
-          <p:cNvPr id="12" name="Image 0" descr="poster_assets/heatmap.png">    </p:cNvPr>
+          <p:cNvPr id="12" name="Image 0" descr="poster_assets/heatmap.png"/>
           <p:cNvPicPr>
             <a:picLocks noChangeAspect="1"/>
           </p:cNvPicPr>
           <p:nvPr/>
         </p:nvPicPr>
         <p:blipFill>
-          <a:blip r:embed="rId1"/>
+          <a:blip r:embed="rId3"/>
           <a:stretch>
             <a:fillRect/>
           </a:stretch>
@@ -4715,7 +4378,7 @@
           <a:bodyPr wrap="square" rtlCol="0" anchor="ctr"/>
           <a:lstStyle/>
           <a:p>
-            <a:pPr algn="r" indent="0" marL="0">
+            <a:pPr marL="0" indent="0" algn="r">
               <a:buNone/>
             </a:pPr>
             <a:r>
@@ -4746,6 +4409,7 @@
         <a:solidFill>
           <a:srgbClr val="FBF7EE"/>
         </a:solidFill>
+        <a:effectLst/>
       </p:bgPr>
     </p:bg>
     <p:spTree>
@@ -4803,7 +4467,7 @@
           <a:bodyPr wrap="square" rtlCol="0" anchor="ctr"/>
           <a:lstStyle/>
           <a:p>
-            <a:pPr indent="0" marL="0">
+            <a:pPr marL="0" indent="0">
               <a:buNone/>
             </a:pPr>
             <a:r>
@@ -4857,15 +4521,27 @@
         </p:nvGraphicFramePr>
         <p:xfrm>
           <a:off x="548640" y="1188720"/>
-          <a:ext cx="5303520" cy="914400"/>
+          <a:ext cx="5303520" cy="3200400"/>
         </p:xfrm>
         <a:graphic>
           <a:graphicData uri="http://schemas.openxmlformats.org/drawingml/2006/table">
             <a:tbl>
               <a:tblPr/>
               <a:tblGrid>
-                <a:gridCol w="2651760"/>
-                <a:gridCol w="2651760"/>
+                <a:gridCol w="2651760">
+                  <a:extLst>
+                    <a:ext uri="{9D8B030D-6E8A-4147-A177-3AD203B41FA5}">
+                      <a16:colId xmlns:a16="http://schemas.microsoft.com/office/drawing/2014/main" val="20000"/>
+                    </a:ext>
+                  </a:extLst>
+                </a:gridCol>
+                <a:gridCol w="2651760">
+                  <a:extLst>
+                    <a:ext uri="{9D8B030D-6E8A-4147-A177-3AD203B41FA5}">
+                      <a16:colId xmlns:a16="http://schemas.microsoft.com/office/drawing/2014/main" val="20001"/>
+                    </a:ext>
+                  </a:extLst>
+                </a:gridCol>
               </a:tblGrid>
               <a:tr h="457200">
                 <a:tc>
@@ -4873,7 +4549,7 @@
                     <a:bodyPr/>
                     <a:lstStyle/>
                     <a:p>
-                      <a:pPr indent="0" marL="0">
+                      <a:pPr marL="0" indent="0">
                         <a:buNone/>
                       </a:pPr>
                       <a:r>
@@ -4887,7 +4563,7 @@
                       <a:endParaRPr lang="en-US" sz="1400" dirty="0"/>
                     </a:p>
                   </a:txBody>
-                  <a:tcPr marL="91440" marR="91440" marT="45720" marB="45720">
+                  <a:tcPr>
                     <a:lnL w="12700" cap="flat" cmpd="sng" algn="ctr">
                       <a:solidFill>
                         <a:srgbClr val="E0E0D8"/>
@@ -4934,7 +4610,7 @@
                     <a:bodyPr/>
                     <a:lstStyle/>
                     <a:p>
-                      <a:pPr indent="0" marL="0">
+                      <a:pPr marL="0" indent="0">
                         <a:buNone/>
                       </a:pPr>
                       <a:r>
@@ -4948,7 +4624,7 @@
                       <a:endParaRPr lang="en-US" sz="1400" dirty="0"/>
                     </a:p>
                   </a:txBody>
-                  <a:tcPr marL="91440" marR="91440" marT="45720" marB="45720">
+                  <a:tcPr>
                     <a:lnL w="12700" cap="flat" cmpd="sng" algn="ctr">
                       <a:solidFill>
                         <a:srgbClr val="E0E0D8"/>
@@ -4990,6 +4666,11 @@
                     </a:solidFill>
                   </a:tcPr>
                 </a:tc>
+                <a:extLst>
+                  <a:ext uri="{0D108BD9-81ED-4DB2-BD59-A6C34878D82A}">
+                    <a16:rowId xmlns:a16="http://schemas.microsoft.com/office/drawing/2014/main" val="10000"/>
+                  </a:ext>
+                </a:extLst>
               </a:tr>
               <a:tr h="457200">
                 <a:tc>
@@ -4997,7 +4678,7 @@
                     <a:bodyPr/>
                     <a:lstStyle/>
                     <a:p>
-                      <a:pPr indent="0" marL="0">
+                      <a:pPr marL="0" indent="0">
                         <a:buNone/>
                       </a:pPr>
                       <a:r>
@@ -5011,7 +4692,7 @@
                       <a:endParaRPr lang="en-US" sz="1400" dirty="0"/>
                     </a:p>
                   </a:txBody>
-                  <a:tcPr marL="91440" marR="91440" marT="45720" marB="45720">
+                  <a:tcPr>
                     <a:lnL w="12700" cap="flat" cmpd="sng" algn="ctr">
                       <a:solidFill>
                         <a:srgbClr val="E0E0D8"/>
@@ -5055,7 +4736,7 @@
                     <a:bodyPr/>
                     <a:lstStyle/>
                     <a:p>
-                      <a:pPr indent="0" marL="0">
+                      <a:pPr marL="0" indent="0">
                         <a:buNone/>
                       </a:pPr>
                       <a:r>
@@ -5069,7 +4750,7 @@
                       <a:endParaRPr lang="en-US" sz="1400" dirty="0"/>
                     </a:p>
                   </a:txBody>
-                  <a:tcPr marL="91440" marR="91440" marT="45720" marB="45720">
+                  <a:tcPr>
                     <a:lnL w="12700" cap="flat" cmpd="sng" algn="ctr">
                       <a:solidFill>
                         <a:srgbClr val="E0E0D8"/>
@@ -5108,6 +4789,11 @@
                     </a:lnB>
                   </a:tcPr>
                 </a:tc>
+                <a:extLst>
+                  <a:ext uri="{0D108BD9-81ED-4DB2-BD59-A6C34878D82A}">
+                    <a16:rowId xmlns:a16="http://schemas.microsoft.com/office/drawing/2014/main" val="10001"/>
+                  </a:ext>
+                </a:extLst>
               </a:tr>
               <a:tr h="457200">
                 <a:tc>
@@ -5115,7 +4801,7 @@
                     <a:bodyPr/>
                     <a:lstStyle/>
                     <a:p>
-                      <a:pPr indent="0" marL="0">
+                      <a:pPr marL="0" indent="0">
                         <a:buNone/>
                       </a:pPr>
                       <a:r>
@@ -5129,7 +4815,7 @@
                       <a:endParaRPr lang="en-US" sz="1400" dirty="0"/>
                     </a:p>
                   </a:txBody>
-                  <a:tcPr marL="91440" marR="91440" marT="45720" marB="45720">
+                  <a:tcPr>
                     <a:lnL w="12700" cap="flat" cmpd="sng" algn="ctr">
                       <a:solidFill>
                         <a:srgbClr val="E0E0D8"/>
@@ -5173,7 +4859,7 @@
                     <a:bodyPr/>
                     <a:lstStyle/>
                     <a:p>
-                      <a:pPr indent="0" marL="0">
+                      <a:pPr marL="0" indent="0">
                         <a:buNone/>
                       </a:pPr>
                       <a:r>
@@ -5187,7 +4873,7 @@
                       <a:endParaRPr lang="en-US" sz="1400" dirty="0"/>
                     </a:p>
                   </a:txBody>
-                  <a:tcPr marL="91440" marR="91440" marT="45720" marB="45720">
+                  <a:tcPr>
                     <a:lnL w="12700" cap="flat" cmpd="sng" algn="ctr">
                       <a:solidFill>
                         <a:srgbClr val="E0E0D8"/>
@@ -5226,6 +4912,11 @@
                     </a:lnB>
                   </a:tcPr>
                 </a:tc>
+                <a:extLst>
+                  <a:ext uri="{0D108BD9-81ED-4DB2-BD59-A6C34878D82A}">
+                    <a16:rowId xmlns:a16="http://schemas.microsoft.com/office/drawing/2014/main" val="10002"/>
+                  </a:ext>
+                </a:extLst>
               </a:tr>
               <a:tr h="457200">
                 <a:tc>
@@ -5233,7 +4924,7 @@
                     <a:bodyPr/>
                     <a:lstStyle/>
                     <a:p>
-                      <a:pPr indent="0" marL="0">
+                      <a:pPr marL="0" indent="0">
                         <a:buNone/>
                       </a:pPr>
                       <a:r>
@@ -5247,7 +4938,7 @@
                       <a:endParaRPr lang="en-US" sz="1400" dirty="0"/>
                     </a:p>
                   </a:txBody>
-                  <a:tcPr marL="91440" marR="91440" marT="45720" marB="45720">
+                  <a:tcPr>
                     <a:lnL w="12700" cap="flat" cmpd="sng" algn="ctr">
                       <a:solidFill>
                         <a:srgbClr val="E0E0D8"/>
@@ -5291,7 +4982,7 @@
                     <a:bodyPr/>
                     <a:lstStyle/>
                     <a:p>
-                      <a:pPr indent="0" marL="0">
+                      <a:pPr marL="0" indent="0">
                         <a:buNone/>
                       </a:pPr>
                       <a:r>
@@ -5305,7 +4996,7 @@
                       <a:endParaRPr lang="en-US" sz="1400" dirty="0"/>
                     </a:p>
                   </a:txBody>
-                  <a:tcPr marL="91440" marR="91440" marT="45720" marB="45720">
+                  <a:tcPr>
                     <a:lnL w="12700" cap="flat" cmpd="sng" algn="ctr">
                       <a:solidFill>
                         <a:srgbClr val="E0E0D8"/>
@@ -5344,6 +5035,11 @@
                     </a:lnB>
                   </a:tcPr>
                 </a:tc>
+                <a:extLst>
+                  <a:ext uri="{0D108BD9-81ED-4DB2-BD59-A6C34878D82A}">
+                    <a16:rowId xmlns:a16="http://schemas.microsoft.com/office/drawing/2014/main" val="10003"/>
+                  </a:ext>
+                </a:extLst>
               </a:tr>
               <a:tr h="457200">
                 <a:tc>
@@ -5351,7 +5047,7 @@
                     <a:bodyPr/>
                     <a:lstStyle/>
                     <a:p>
-                      <a:pPr indent="0" marL="0">
+                      <a:pPr marL="0" indent="0">
                         <a:buNone/>
                       </a:pPr>
                       <a:r>
@@ -5365,7 +5061,7 @@
                       <a:endParaRPr lang="en-US" sz="1400" dirty="0"/>
                     </a:p>
                   </a:txBody>
-                  <a:tcPr marL="91440" marR="91440" marT="45720" marB="45720">
+                  <a:tcPr>
                     <a:lnL w="12700" cap="flat" cmpd="sng" algn="ctr">
                       <a:solidFill>
                         <a:srgbClr val="E0E0D8"/>
@@ -5409,7 +5105,7 @@
                     <a:bodyPr/>
                     <a:lstStyle/>
                     <a:p>
-                      <a:pPr indent="0" marL="0">
+                      <a:pPr marL="0" indent="0">
                         <a:buNone/>
                       </a:pPr>
                       <a:r>
@@ -5423,7 +5119,7 @@
                       <a:endParaRPr lang="en-US" sz="1400" dirty="0"/>
                     </a:p>
                   </a:txBody>
-                  <a:tcPr marL="91440" marR="91440" marT="45720" marB="45720">
+                  <a:tcPr>
                     <a:lnL w="12700" cap="flat" cmpd="sng" algn="ctr">
                       <a:solidFill>
                         <a:srgbClr val="E0E0D8"/>
@@ -5462,6 +5158,11 @@
                     </a:lnB>
                   </a:tcPr>
                 </a:tc>
+                <a:extLst>
+                  <a:ext uri="{0D108BD9-81ED-4DB2-BD59-A6C34878D82A}">
+                    <a16:rowId xmlns:a16="http://schemas.microsoft.com/office/drawing/2014/main" val="10004"/>
+                  </a:ext>
+                </a:extLst>
               </a:tr>
               <a:tr h="457200">
                 <a:tc>
@@ -5469,7 +5170,7 @@
                     <a:bodyPr/>
                     <a:lstStyle/>
                     <a:p>
-                      <a:pPr indent="0" marL="0">
+                      <a:pPr marL="0" indent="0">
                         <a:buNone/>
                       </a:pPr>
                       <a:r>
@@ -5483,7 +5184,7 @@
                       <a:endParaRPr lang="en-US" sz="1400" dirty="0"/>
                     </a:p>
                   </a:txBody>
-                  <a:tcPr marL="91440" marR="91440" marT="45720" marB="45720">
+                  <a:tcPr>
                     <a:lnL w="12700" cap="flat" cmpd="sng" algn="ctr">
                       <a:solidFill>
                         <a:srgbClr val="E0E0D8"/>
@@ -5527,7 +5228,7 @@
                     <a:bodyPr/>
                     <a:lstStyle/>
                     <a:p>
-                      <a:pPr indent="0" marL="0">
+                      <a:pPr marL="0" indent="0">
                         <a:buNone/>
                       </a:pPr>
                       <a:r>
@@ -5541,7 +5242,7 @@
                       <a:endParaRPr lang="en-US" sz="1400" dirty="0"/>
                     </a:p>
                   </a:txBody>
-                  <a:tcPr marL="91440" marR="91440" marT="45720" marB="45720">
+                  <a:tcPr>
                     <a:lnL w="12700" cap="flat" cmpd="sng" algn="ctr">
                       <a:solidFill>
                         <a:srgbClr val="E0E0D8"/>
@@ -5580,6 +5281,11 @@
                     </a:lnB>
                   </a:tcPr>
                 </a:tc>
+                <a:extLst>
+                  <a:ext uri="{0D108BD9-81ED-4DB2-BD59-A6C34878D82A}">
+                    <a16:rowId xmlns:a16="http://schemas.microsoft.com/office/drawing/2014/main" val="10005"/>
+                  </a:ext>
+                </a:extLst>
               </a:tr>
               <a:tr h="457200">
                 <a:tc>
@@ -5587,7 +5293,7 @@
                     <a:bodyPr/>
                     <a:lstStyle/>
                     <a:p>
-                      <a:pPr indent="0" marL="0">
+                      <a:pPr marL="0" indent="0">
                         <a:buNone/>
                       </a:pPr>
                       <a:r>
@@ -5601,7 +5307,7 @@
                       <a:endParaRPr lang="en-US" sz="1400" dirty="0"/>
                     </a:p>
                   </a:txBody>
-                  <a:tcPr marL="91440" marR="91440" marT="45720" marB="45720">
+                  <a:tcPr>
                     <a:lnL w="12700" cap="flat" cmpd="sng" algn="ctr">
                       <a:solidFill>
                         <a:srgbClr val="E0E0D8"/>
@@ -5645,7 +5351,7 @@
                     <a:bodyPr/>
                     <a:lstStyle/>
                     <a:p>
-                      <a:pPr indent="0" marL="0">
+                      <a:pPr marL="0" indent="0">
                         <a:buNone/>
                       </a:pPr>
                       <a:r>
@@ -5659,7 +5365,7 @@
                       <a:endParaRPr lang="en-US" sz="1400" dirty="0"/>
                     </a:p>
                   </a:txBody>
-                  <a:tcPr marL="91440" marR="91440" marT="45720" marB="45720">
+                  <a:tcPr>
                     <a:lnL w="12700" cap="flat" cmpd="sng" algn="ctr">
                       <a:solidFill>
                         <a:srgbClr val="E0E0D8"/>
@@ -5698,6 +5404,11 @@
                     </a:lnB>
                   </a:tcPr>
                 </a:tc>
+                <a:extLst>
+                  <a:ext uri="{0D108BD9-81ED-4DB2-BD59-A6C34878D82A}">
+                    <a16:rowId xmlns:a16="http://schemas.microsoft.com/office/drawing/2014/main" val="10006"/>
+                  </a:ext>
+                </a:extLst>
               </a:tr>
             </a:tbl>
           </a:graphicData>
@@ -5724,7 +5435,7 @@
           <a:bodyPr wrap="square" rtlCol="0" anchor="ctr"/>
           <a:lstStyle/>
           <a:p>
-            <a:pPr indent="0" marL="0">
+            <a:pPr marL="0" indent="0">
               <a:buNone/>
             </a:pPr>
             <a:r>
@@ -5755,16 +5466,34 @@
         </p:nvGraphicFramePr>
         <p:xfrm>
           <a:off x="6217920" y="1645920"/>
-          <a:ext cx="5394960" cy="914400"/>
+          <a:ext cx="5394960" cy="1935480"/>
         </p:xfrm>
         <a:graphic>
           <a:graphicData uri="http://schemas.openxmlformats.org/drawingml/2006/table">
             <a:tbl>
               <a:tblPr/>
               <a:tblGrid>
-                <a:gridCol w="1798320"/>
-                <a:gridCol w="1798320"/>
-                <a:gridCol w="1798320"/>
+                <a:gridCol w="1798320">
+                  <a:extLst>
+                    <a:ext uri="{9D8B030D-6E8A-4147-A177-3AD203B41FA5}">
+                      <a16:colId xmlns:a16="http://schemas.microsoft.com/office/drawing/2014/main" val="20000"/>
+                    </a:ext>
+                  </a:extLst>
+                </a:gridCol>
+                <a:gridCol w="1798320">
+                  <a:extLst>
+                    <a:ext uri="{9D8B030D-6E8A-4147-A177-3AD203B41FA5}">
+                      <a16:colId xmlns:a16="http://schemas.microsoft.com/office/drawing/2014/main" val="20001"/>
+                    </a:ext>
+                  </a:extLst>
+                </a:gridCol>
+                <a:gridCol w="1798320">
+                  <a:extLst>
+                    <a:ext uri="{9D8B030D-6E8A-4147-A177-3AD203B41FA5}">
+                      <a16:colId xmlns:a16="http://schemas.microsoft.com/office/drawing/2014/main" val="20002"/>
+                    </a:ext>
+                  </a:extLst>
+                </a:gridCol>
               </a:tblGrid>
               <a:tr h="365760">
                 <a:tc>
@@ -5772,7 +5501,7 @@
                     <a:bodyPr/>
                     <a:lstStyle/>
                     <a:p>
-                      <a:pPr indent="0" marL="0">
+                      <a:pPr marL="0" indent="0">
                         <a:buNone/>
                       </a:pPr>
                       <a:r>
@@ -5786,7 +5515,7 @@
                       <a:endParaRPr lang="en-US" sz="1250" dirty="0"/>
                     </a:p>
                   </a:txBody>
-                  <a:tcPr marL="91440" marR="91440" marT="45720" marB="45720">
+                  <a:tcPr>
                     <a:lnL w="12700" cap="flat" cmpd="sng" algn="ctr">
                       <a:solidFill>
                         <a:srgbClr val="E0E0D8"/>
@@ -5833,7 +5562,7 @@
                     <a:bodyPr/>
                     <a:lstStyle/>
                     <a:p>
-                      <a:pPr indent="0" marL="0">
+                      <a:pPr marL="0" indent="0">
                         <a:buNone/>
                       </a:pPr>
                       <a:r>
@@ -5847,7 +5576,7 @@
                       <a:endParaRPr lang="en-US" sz="1250" dirty="0"/>
                     </a:p>
                   </a:txBody>
-                  <a:tcPr marL="91440" marR="91440" marT="45720" marB="45720">
+                  <a:tcPr>
                     <a:lnL w="12700" cap="flat" cmpd="sng" algn="ctr">
                       <a:solidFill>
                         <a:srgbClr val="E0E0D8"/>
@@ -5894,7 +5623,7 @@
                     <a:bodyPr/>
                     <a:lstStyle/>
                     <a:p>
-                      <a:pPr indent="0" marL="0">
+                      <a:pPr marL="0" indent="0">
                         <a:buNone/>
                       </a:pPr>
                       <a:r>
@@ -5908,7 +5637,7 @@
                       <a:endParaRPr lang="en-US" sz="1250" dirty="0"/>
                     </a:p>
                   </a:txBody>
-                  <a:tcPr marL="91440" marR="91440" marT="45720" marB="45720">
+                  <a:tcPr>
                     <a:lnL w="12700" cap="flat" cmpd="sng" algn="ctr">
                       <a:solidFill>
                         <a:srgbClr val="E0E0D8"/>
@@ -5950,6 +5679,11 @@
                     </a:solidFill>
                   </a:tcPr>
                 </a:tc>
+                <a:extLst>
+                  <a:ext uri="{0D108BD9-81ED-4DB2-BD59-A6C34878D82A}">
+                    <a16:rowId xmlns:a16="http://schemas.microsoft.com/office/drawing/2014/main" val="10000"/>
+                  </a:ext>
+                </a:extLst>
               </a:tr>
               <a:tr h="365760">
                 <a:tc>
@@ -5957,7 +5691,7 @@
                     <a:bodyPr/>
                     <a:lstStyle/>
                     <a:p>
-                      <a:pPr indent="0" marL="0">
+                      <a:pPr marL="0" indent="0">
                         <a:buNone/>
                       </a:pPr>
                       <a:r>
@@ -5971,7 +5705,7 @@
                       <a:endParaRPr lang="en-US" sz="1250" dirty="0"/>
                     </a:p>
                   </a:txBody>
-                  <a:tcPr marL="91440" marR="91440" marT="45720" marB="45720">
+                  <a:tcPr>
                     <a:lnL w="12700" cap="flat" cmpd="sng" algn="ctr">
                       <a:solidFill>
                         <a:srgbClr val="E0E0D8"/>
@@ -6015,7 +5749,7 @@
                     <a:bodyPr/>
                     <a:lstStyle/>
                     <a:p>
-                      <a:pPr indent="0" marL="0">
+                      <a:pPr marL="0" indent="0">
                         <a:buNone/>
                       </a:pPr>
                       <a:r>
@@ -6029,7 +5763,7 @@
                       <a:endParaRPr lang="en-US" sz="1250" dirty="0"/>
                     </a:p>
                   </a:txBody>
-                  <a:tcPr marL="91440" marR="91440" marT="45720" marB="45720">
+                  <a:tcPr>
                     <a:lnL w="12700" cap="flat" cmpd="sng" algn="ctr">
                       <a:solidFill>
                         <a:srgbClr val="E0E0D8"/>
@@ -6073,7 +5807,7 @@
                     <a:bodyPr/>
                     <a:lstStyle/>
                     <a:p>
-                      <a:pPr indent="0" marL="0">
+                      <a:pPr marL="0" indent="0">
                         <a:buNone/>
                       </a:pPr>
                       <a:r>
@@ -6087,7 +5821,7 @@
                       <a:endParaRPr lang="en-US" sz="1250" dirty="0"/>
                     </a:p>
                   </a:txBody>
-                  <a:tcPr marL="91440" marR="91440" marT="45720" marB="45720">
+                  <a:tcPr>
                     <a:lnL w="12700" cap="flat" cmpd="sng" algn="ctr">
                       <a:solidFill>
                         <a:srgbClr val="E0E0D8"/>
@@ -6126,6 +5860,11 @@
                     </a:lnB>
                   </a:tcPr>
                 </a:tc>
+                <a:extLst>
+                  <a:ext uri="{0D108BD9-81ED-4DB2-BD59-A6C34878D82A}">
+                    <a16:rowId xmlns:a16="http://schemas.microsoft.com/office/drawing/2014/main" val="10001"/>
+                  </a:ext>
+                </a:extLst>
               </a:tr>
               <a:tr h="365760">
                 <a:tc>
@@ -6133,7 +5872,7 @@
                     <a:bodyPr/>
                     <a:lstStyle/>
                     <a:p>
-                      <a:pPr indent="0" marL="0">
+                      <a:pPr marL="0" indent="0">
                         <a:buNone/>
                       </a:pPr>
                       <a:r>
@@ -6147,7 +5886,7 @@
                       <a:endParaRPr lang="en-US" sz="1250" dirty="0"/>
                     </a:p>
                   </a:txBody>
-                  <a:tcPr marL="91440" marR="91440" marT="45720" marB="45720">
+                  <a:tcPr>
                     <a:lnL w="12700" cap="flat" cmpd="sng" algn="ctr">
                       <a:solidFill>
                         <a:srgbClr val="E0E0D8"/>
@@ -6191,7 +5930,7 @@
                     <a:bodyPr/>
                     <a:lstStyle/>
                     <a:p>
-                      <a:pPr indent="0" marL="0">
+                      <a:pPr marL="0" indent="0">
                         <a:buNone/>
                       </a:pPr>
                       <a:r>
@@ -6205,7 +5944,7 @@
                       <a:endParaRPr lang="en-US" sz="1250" dirty="0"/>
                     </a:p>
                   </a:txBody>
-                  <a:tcPr marL="91440" marR="91440" marT="45720" marB="45720">
+                  <a:tcPr>
                     <a:lnL w="12700" cap="flat" cmpd="sng" algn="ctr">
                       <a:solidFill>
                         <a:srgbClr val="E0E0D8"/>
@@ -6249,7 +5988,7 @@
                     <a:bodyPr/>
                     <a:lstStyle/>
                     <a:p>
-                      <a:pPr indent="0" marL="0">
+                      <a:pPr marL="0" indent="0">
                         <a:buNone/>
                       </a:pPr>
                       <a:r>
@@ -6263,7 +6002,7 @@
                       <a:endParaRPr lang="en-US" sz="1250" dirty="0"/>
                     </a:p>
                   </a:txBody>
-                  <a:tcPr marL="91440" marR="91440" marT="45720" marB="45720">
+                  <a:tcPr>
                     <a:lnL w="12700" cap="flat" cmpd="sng" algn="ctr">
                       <a:solidFill>
                         <a:srgbClr val="E0E0D8"/>
@@ -6302,6 +6041,11 @@
                     </a:lnB>
                   </a:tcPr>
                 </a:tc>
+                <a:extLst>
+                  <a:ext uri="{0D108BD9-81ED-4DB2-BD59-A6C34878D82A}">
+                    <a16:rowId xmlns:a16="http://schemas.microsoft.com/office/drawing/2014/main" val="10002"/>
+                  </a:ext>
+                </a:extLst>
               </a:tr>
               <a:tr h="365760">
                 <a:tc>
@@ -6309,7 +6053,7 @@
                     <a:bodyPr/>
                     <a:lstStyle/>
                     <a:p>
-                      <a:pPr indent="0" marL="0">
+                      <a:pPr marL="0" indent="0">
                         <a:buNone/>
                       </a:pPr>
                       <a:r>
@@ -6323,7 +6067,7 @@
                       <a:endParaRPr lang="en-US" sz="1250" dirty="0"/>
                     </a:p>
                   </a:txBody>
-                  <a:tcPr marL="91440" marR="91440" marT="45720" marB="45720">
+                  <a:tcPr>
                     <a:lnL w="12700" cap="flat" cmpd="sng" algn="ctr">
                       <a:solidFill>
                         <a:srgbClr val="E0E0D8"/>
@@ -6367,7 +6111,7 @@
                     <a:bodyPr/>
                     <a:lstStyle/>
                     <a:p>
-                      <a:pPr indent="0" marL="0">
+                      <a:pPr marL="0" indent="0">
                         <a:buNone/>
                       </a:pPr>
                       <a:r>
@@ -6381,7 +6125,7 @@
                       <a:endParaRPr lang="en-US" sz="1250" dirty="0"/>
                     </a:p>
                   </a:txBody>
-                  <a:tcPr marL="91440" marR="91440" marT="45720" marB="45720">
+                  <a:tcPr>
                     <a:lnL w="12700" cap="flat" cmpd="sng" algn="ctr">
                       <a:solidFill>
                         <a:srgbClr val="E0E0D8"/>
@@ -6425,7 +6169,7 @@
                     <a:bodyPr/>
                     <a:lstStyle/>
                     <a:p>
-                      <a:pPr indent="0" marL="0">
+                      <a:pPr marL="0" indent="0">
                         <a:buNone/>
                       </a:pPr>
                       <a:r>
@@ -6439,7 +6183,7 @@
                       <a:endParaRPr lang="en-US" sz="1250" dirty="0"/>
                     </a:p>
                   </a:txBody>
-                  <a:tcPr marL="91440" marR="91440" marT="45720" marB="45720">
+                  <a:tcPr>
                     <a:lnL w="12700" cap="flat" cmpd="sng" algn="ctr">
                       <a:solidFill>
                         <a:srgbClr val="E0E0D8"/>
@@ -6478,6 +6222,11 @@
                     </a:lnB>
                   </a:tcPr>
                 </a:tc>
+                <a:extLst>
+                  <a:ext uri="{0D108BD9-81ED-4DB2-BD59-A6C34878D82A}">
+                    <a16:rowId xmlns:a16="http://schemas.microsoft.com/office/drawing/2014/main" val="10003"/>
+                  </a:ext>
+                </a:extLst>
               </a:tr>
               <a:tr h="365760">
                 <a:tc>
@@ -6485,7 +6234,7 @@
                     <a:bodyPr/>
                     <a:lstStyle/>
                     <a:p>
-                      <a:pPr indent="0" marL="0">
+                      <a:pPr marL="0" indent="0">
                         <a:buNone/>
                       </a:pPr>
                       <a:r>
@@ -6499,7 +6248,7 @@
                       <a:endParaRPr lang="en-US" sz="1250" dirty="0"/>
                     </a:p>
                   </a:txBody>
-                  <a:tcPr marL="91440" marR="91440" marT="45720" marB="45720">
+                  <a:tcPr>
                     <a:lnL w="12700" cap="flat" cmpd="sng" algn="ctr">
                       <a:solidFill>
                         <a:srgbClr val="E0E0D8"/>
@@ -6543,7 +6292,7 @@
                     <a:bodyPr/>
                     <a:lstStyle/>
                     <a:p>
-                      <a:pPr indent="0" marL="0">
+                      <a:pPr marL="0" indent="0">
                         <a:buNone/>
                       </a:pPr>
                       <a:r>
@@ -6557,7 +6306,7 @@
                       <a:endParaRPr lang="en-US" sz="1250" dirty="0"/>
                     </a:p>
                   </a:txBody>
-                  <a:tcPr marL="91440" marR="91440" marT="45720" marB="45720">
+                  <a:tcPr>
                     <a:lnL w="12700" cap="flat" cmpd="sng" algn="ctr">
                       <a:solidFill>
                         <a:srgbClr val="E0E0D8"/>
@@ -6601,7 +6350,7 @@
                     <a:bodyPr/>
                     <a:lstStyle/>
                     <a:p>
-                      <a:pPr indent="0" marL="0">
+                      <a:pPr marL="0" indent="0">
                         <a:buNone/>
                       </a:pPr>
                       <a:r>
@@ -6615,7 +6364,7 @@
                       <a:endParaRPr lang="en-US" sz="1250" dirty="0"/>
                     </a:p>
                   </a:txBody>
-                  <a:tcPr marL="91440" marR="91440" marT="45720" marB="45720">
+                  <a:tcPr>
                     <a:lnL w="12700" cap="flat" cmpd="sng" algn="ctr">
                       <a:solidFill>
                         <a:srgbClr val="E0E0D8"/>
@@ -6654,6 +6403,11 @@
                     </a:lnB>
                   </a:tcPr>
                 </a:tc>
+                <a:extLst>
+                  <a:ext uri="{0D108BD9-81ED-4DB2-BD59-A6C34878D82A}">
+                    <a16:rowId xmlns:a16="http://schemas.microsoft.com/office/drawing/2014/main" val="10004"/>
+                  </a:ext>
+                </a:extLst>
               </a:tr>
             </a:tbl>
           </a:graphicData>
@@ -6688,7 +6442,7 @@
       </p:sp>
       <p:sp>
         <p:nvSpPr>
-          <p:cNvPr id="9" name="Text 5"/>
+          <p:cNvPr id="7" name="Text 5"/>
           <p:cNvSpPr txBox="1"/>
           <p:nvPr/>
         </p:nvSpPr>
@@ -6707,7 +6461,7 @@
           <a:bodyPr wrap="square" rtlCol="0" anchor="ctr"/>
           <a:lstStyle/>
           <a:p>
-            <a:pPr indent="0" marL="0">
+            <a:pPr marL="0" indent="0">
               <a:buNone/>
             </a:pPr>
             <a:r>
@@ -6716,7 +6470,71 @@
                   <a:srgbClr val="1F2A1F"/>
                 </a:solidFill>
               </a:rPr>
-              <a:t>Phần lớn missing mang tính "ngữ nghĩa" (nhà không có đặc điểm đó), không phải lỗi nhập liệu — quyết định: điền giá trị 0/"None", không dùng median/mode mặc định.</a:t>
+              <a:t>Phần lớn missing mang tính "ngữ nghĩa" (nhà không có đặc điểm đó), không phải lỗi </a:t>
+            </a:r>
+            <a:r>
+              <a:rPr lang="en-US" sz="1300" dirty="0" err="1">
+                <a:solidFill>
+                  <a:srgbClr val="1F2A1F"/>
+                </a:solidFill>
+              </a:rPr>
+              <a:t>nhập</a:t>
+            </a:r>
+            <a:r>
+              <a:rPr lang="en-US" sz="1300" dirty="0">
+                <a:solidFill>
+                  <a:srgbClr val="1F2A1F"/>
+                </a:solidFill>
+              </a:rPr>
+              <a:t> </a:t>
+            </a:r>
+            <a:r>
+              <a:rPr lang="en-US" sz="1300" dirty="0" err="1">
+                <a:solidFill>
+                  <a:srgbClr val="1F2A1F"/>
+                </a:solidFill>
+              </a:rPr>
+              <a:t>liệu</a:t>
+            </a:r>
+            <a:r>
+              <a:rPr lang="en-US" sz="1300" dirty="0">
+                <a:solidFill>
+                  <a:srgbClr val="1F2A1F"/>
+                </a:solidFill>
+              </a:rPr>
+              <a:t> </a:t>
+            </a:r>
+            <a:r>
+              <a:rPr lang="en-US" sz="1300" dirty="0" err="1">
+                <a:solidFill>
+                  <a:srgbClr val="1F2A1F"/>
+                </a:solidFill>
+              </a:rPr>
+              <a:t>cho</a:t>
+            </a:r>
+            <a:r>
+              <a:rPr lang="en-US" sz="1300" dirty="0">
+                <a:solidFill>
+                  <a:srgbClr val="1F2A1F"/>
+                </a:solidFill>
+              </a:rPr>
+              <a:t> </a:t>
+            </a:r>
+            <a:r>
+              <a:rPr lang="en-US" sz="1300" dirty="0" err="1">
+                <a:solidFill>
+                  <a:srgbClr val="1F2A1F"/>
+                </a:solidFill>
+              </a:rPr>
+              <a:t>nên</a:t>
+            </a:r>
+            <a:r>
+              <a:rPr lang="en-US" sz="1300" dirty="0">
+                <a:solidFill>
+                  <a:srgbClr val="1F2A1F"/>
+                </a:solidFill>
+              </a:rPr>
+              <a:t> quyết định: điền giá trị 0/"None", không dùng median/mode mặc định.</a:t>
             </a:r>
             <a:endParaRPr lang="en-US" sz="1300" dirty="0"/>
           </a:p>
@@ -6743,7 +6561,7 @@
           <a:bodyPr wrap="square" rtlCol="0" anchor="ctr"/>
           <a:lstStyle/>
           <a:p>
-            <a:pPr algn="r" indent="0" marL="0">
+            <a:pPr marL="0" indent="0" algn="r">
               <a:buNone/>
             </a:pPr>
             <a:r>
@@ -6774,6 +6592,7 @@
         <a:solidFill>
           <a:srgbClr val="FBF7EE"/>
         </a:solidFill>
+        <a:effectLst/>
       </p:bgPr>
     </p:bg>
     <p:spTree>
@@ -6831,7 +6650,7 @@
           <a:bodyPr wrap="square" rtlCol="0" anchor="ctr"/>
           <a:lstStyle/>
           <a:p>
-            <a:pPr indent="0" marL="0">
+            <a:pPr marL="0" indent="0">
               <a:buNone/>
             </a:pPr>
             <a:r>
@@ -6871,14 +6690,14 @@
       </p:sp>
       <p:pic>
         <p:nvPicPr>
-          <p:cNvPr id="5" name="Image 0" descr="poster_assets/n3.png">    </p:cNvPr>
+          <p:cNvPr id="5" name="Image 0" descr="poster_assets/n3.png"/>
           <p:cNvPicPr>
             <a:picLocks noChangeAspect="1"/>
           </p:cNvPicPr>
           <p:nvPr/>
         </p:nvPicPr>
         <p:blipFill>
-          <a:blip r:embed="rId1"/>
+          <a:blip r:embed="rId3"/>
           <a:stretch>
             <a:fillRect/>
           </a:stretch>
@@ -6914,7 +6733,7 @@
           <a:bodyPr wrap="square" rtlCol="0" anchor="ctr"/>
           <a:lstStyle/>
           <a:p>
-            <a:pPr indent="0" marL="0">
+            <a:pPr marL="0" indent="0">
               <a:lnSpc>
                 <a:spcPct val="120000"/>
               </a:lnSpc>
@@ -6929,12 +6748,6 @@
               <a:t>Phát hiện chính
 </a:t>
             </a:r>
-            <a:pPr indent="0" marL="0">
-              <a:lnSpc>
-                <a:spcPct val="120000"/>
-              </a:lnSpc>
-              <a:buNone/>
-            </a:pPr>
             <a:r>
               <a:rPr lang="en-US" sz="1400" dirty="0">
                 <a:solidFill>
@@ -6942,51 +6755,9 @@
                 </a:solidFill>
               </a:rPr>
               <a:t>• SalePrice lệch phải (skew=1.73) → log1p còn 0.15
-</a:t>
-            </a:r>
-            <a:pPr indent="0" marL="0">
-              <a:lnSpc>
-                <a:spcPct val="120000"/>
-              </a:lnSpc>
-              <a:buNone/>
-            </a:pPr>
-            <a:r>
-              <a:rPr lang="en-US" sz="1400" dirty="0">
-                <a:solidFill>
-                  <a:srgbClr val="1F2A1F"/>
-                </a:solidFill>
-              </a:rPr>
-              <a:t>• Top tương quan: OverallQual (0.79), GrLivArea (0.69), GarageCars (0.64)
-</a:t>
-            </a:r>
-            <a:pPr indent="0" marL="0">
-              <a:lnSpc>
-                <a:spcPct val="120000"/>
-              </a:lnSpc>
-              <a:buNone/>
-            </a:pPr>
-            <a:r>
-              <a:rPr lang="en-US" sz="1400" dirty="0">
-                <a:solidFill>
-                  <a:srgbClr val="1F2A1F"/>
-                </a:solidFill>
-              </a:rPr>
-              <a:t>• ExterQual, FireplaceQu: bậc thang tăng rõ theo chất lượng
-</a:t>
-            </a:r>
-            <a:pPr indent="0" marL="0">
-              <a:lnSpc>
-                <a:spcPct val="120000"/>
-              </a:lnSpc>
-              <a:buNone/>
-            </a:pPr>
-            <a:r>
-              <a:rPr lang="en-US" sz="1400" dirty="0">
-                <a:solidFill>
-                  <a:srgbClr val="1F2A1F"/>
-                </a:solidFill>
-              </a:rPr>
-              <a:t>• Phát hiện 2 ngoại lai đã biết của dataset (GrLivArea lớn, giá thấp bất thường, Partial sale)</a:t>
+• Top tương quan: OverallQual (0.79), GrLivArea (0.69), GarageCars (0.64)
+• ExterQual, FireplaceQu: bậc thang tăng rõ theo chất lượng
+• Phát hiện 2 ngoại lai đã biết của dataset (GrLivArea lớn, giá thấp bất thường, Partial sale)</a:t>
             </a:r>
             <a:endParaRPr lang="en-US" sz="1700" dirty="0"/>
           </a:p>
@@ -7013,7 +6784,7 @@
           <a:bodyPr wrap="square" rtlCol="0" anchor="ctr"/>
           <a:lstStyle/>
           <a:p>
-            <a:pPr algn="r" indent="0" marL="0">
+            <a:pPr marL="0" indent="0" algn="r">
               <a:buNone/>
             </a:pPr>
             <a:r>
@@ -7044,6 +6815,7 @@
         <a:solidFill>
           <a:srgbClr val="FBF7EE"/>
         </a:solidFill>
+        <a:effectLst/>
       </p:bgPr>
     </p:bg>
     <p:spTree>
@@ -7101,7 +6873,7 @@
           <a:bodyPr wrap="square" rtlCol="0" anchor="ctr"/>
           <a:lstStyle/>
           <a:p>
-            <a:pPr indent="0" marL="0">
+            <a:pPr marL="0" indent="0">
               <a:buNone/>
             </a:pPr>
             <a:r>
@@ -7160,7 +6932,7 @@
           <a:bodyPr wrap="square" rtlCol="0" anchor="ctr"/>
           <a:lstStyle/>
           <a:p>
-            <a:pPr indent="0" marL="0">
+            <a:pPr marL="0" indent="0">
               <a:buNone/>
             </a:pPr>
             <a:r>
@@ -7223,7 +6995,7 @@
           <a:bodyPr wrap="square" rtlCol="0" anchor="ctr"/>
           <a:lstStyle/>
           <a:p>
-            <a:pPr algn="ctr" indent="0" marL="0">
+            <a:pPr marL="0" indent="0" algn="ctr">
               <a:buNone/>
             </a:pPr>
             <a:r>
@@ -7286,7 +7058,7 @@
           <a:bodyPr wrap="square" rtlCol="0" anchor="ctr"/>
           <a:lstStyle/>
           <a:p>
-            <a:pPr algn="ctr" indent="0" marL="0">
+            <a:pPr marL="0" indent="0" algn="ctr">
               <a:buNone/>
             </a:pPr>
             <a:r>
@@ -7349,7 +7121,7 @@
           <a:bodyPr wrap="square" rtlCol="0" anchor="ctr"/>
           <a:lstStyle/>
           <a:p>
-            <a:pPr algn="ctr" indent="0" marL="0">
+            <a:pPr marL="0" indent="0" algn="ctr">
               <a:buNone/>
             </a:pPr>
             <a:r>
@@ -7412,7 +7184,7 @@
           <a:bodyPr wrap="square" rtlCol="0" anchor="ctr"/>
           <a:lstStyle/>
           <a:p>
-            <a:pPr algn="ctr" indent="0" marL="0">
+            <a:pPr marL="0" indent="0" algn="ctr">
               <a:buNone/>
             </a:pPr>
             <a:r>
@@ -7475,7 +7247,7 @@
           <a:bodyPr wrap="square" rtlCol="0" anchor="ctr"/>
           <a:lstStyle/>
           <a:p>
-            <a:pPr algn="ctr" indent="0" marL="0">
+            <a:pPr marL="0" indent="0" algn="ctr">
               <a:buNone/>
             </a:pPr>
             <a:r>
@@ -7538,7 +7310,7 @@
           <a:bodyPr wrap="square" rtlCol="0" anchor="ctr"/>
           <a:lstStyle/>
           <a:p>
-            <a:pPr algn="ctr" indent="0" marL="0">
+            <a:pPr marL="0" indent="0" algn="ctr">
               <a:buNone/>
             </a:pPr>
             <a:r>
@@ -7601,7 +7373,7 @@
           <a:bodyPr wrap="square" rtlCol="0" anchor="ctr"/>
           <a:lstStyle/>
           <a:p>
-            <a:pPr algn="ctr" indent="0" marL="0">
+            <a:pPr marL="0" indent="0" algn="ctr">
               <a:buNone/>
             </a:pPr>
             <a:r>
@@ -7664,7 +7436,7 @@
           <a:bodyPr wrap="square" rtlCol="0" anchor="ctr"/>
           <a:lstStyle/>
           <a:p>
-            <a:pPr algn="ctr" indent="0" marL="0">
+            <a:pPr marL="0" indent="0" algn="ctr">
               <a:buNone/>
             </a:pPr>
             <a:r>
@@ -7727,7 +7499,7 @@
           <a:bodyPr wrap="square" rtlCol="0" anchor="ctr"/>
           <a:lstStyle/>
           <a:p>
-            <a:pPr algn="ctr" indent="0" marL="0">
+            <a:pPr marL="0" indent="0" algn="ctr">
               <a:buNone/>
             </a:pPr>
             <a:r>
@@ -7790,7 +7562,7 @@
           <a:bodyPr wrap="square" rtlCol="0" anchor="ctr"/>
           <a:lstStyle/>
           <a:p>
-            <a:pPr indent="0" marL="0">
+            <a:pPr marL="0" indent="0">
               <a:lnSpc>
                 <a:spcPct val="115000"/>
               </a:lnSpc>
@@ -7802,15 +7574,41 @@
                   <a:srgbClr val="8A6D00"/>
                 </a:solidFill>
               </a:rPr>
-              <a:t>Đối chiếu ngược với EDA toàn bộ 79 cột
+              <a:t>Đối </a:t>
+            </a:r>
+            <a:r>
+              <a:rPr lang="en-US" sz="1600" b="1" dirty="0" err="1">
+                <a:solidFill>
+                  <a:srgbClr val="8A6D00"/>
+                </a:solidFill>
+              </a:rPr>
+              <a:t>chiếu</a:t>
+            </a:r>
+            <a:r>
+              <a:rPr lang="en-US" sz="1600" b="1" dirty="0">
+                <a:solidFill>
+                  <a:srgbClr val="8A6D00"/>
+                </a:solidFill>
+              </a:rPr>
+              <a:t> </a:t>
+            </a:r>
+            <a:r>
+              <a:rPr lang="en-US" sz="1600" b="1" dirty="0" err="1">
+                <a:solidFill>
+                  <a:srgbClr val="8A6D00"/>
+                </a:solidFill>
+              </a:rPr>
+              <a:t>với</a:t>
+            </a:r>
+            <a:r>
+              <a:rPr lang="en-US" sz="1600" b="1" dirty="0">
+                <a:solidFill>
+                  <a:srgbClr val="8A6D00"/>
+                </a:solidFill>
+              </a:rPr>
+              <a:t> EDA toàn bộ 79 cột
 </a:t>
             </a:r>
-            <a:pPr indent="0" marL="0">
-              <a:lnSpc>
-                <a:spcPct val="115000"/>
-              </a:lnSpc>
-              <a:buNone/>
-            </a:pPr>
             <a:r>
               <a:rPr lang="en-US" sz="1400" dirty="0">
                 <a:solidFill>
@@ -7820,12 +7618,6 @@
               <a:t>8 cột loại đúng (tín hiệu yếu): PoolArea, PoolQC, Fence, MiscFeature, MiscVal, EnclosedPorch, 3SsnPorch, ScreenPorch
 </a:t>
             </a:r>
-            <a:pPr indent="0" marL="0">
-              <a:lnSpc>
-                <a:spcPct val="115000"/>
-              </a:lnSpc>
-              <a:buNone/>
-            </a:pPr>
             <a:r>
               <a:rPr lang="en-US" sz="1400" b="1" dirty="0">
                 <a:solidFill>
@@ -7860,7 +7652,7 @@
           <a:bodyPr wrap="square" rtlCol="0" anchor="ctr"/>
           <a:lstStyle/>
           <a:p>
-            <a:pPr algn="r" indent="0" marL="0">
+            <a:pPr marL="0" indent="0" algn="r">
               <a:buNone/>
             </a:pPr>
             <a:r>
@@ -7891,6 +7683,7 @@
         <a:solidFill>
           <a:srgbClr val="FBF7EE"/>
         </a:solidFill>
+        <a:effectLst/>
       </p:bgPr>
     </p:bg>
     <p:spTree>
@@ -7948,7 +7741,7 @@
           <a:bodyPr wrap="square" rtlCol="0" anchor="ctr"/>
           <a:lstStyle/>
           <a:p>
-            <a:pPr indent="0" marL="0">
+            <a:pPr marL="0" indent="0">
               <a:buNone/>
             </a:pPr>
             <a:r>
@@ -7995,22 +7788,34 @@
           <p:nvPr>
             <p:extLst>
               <p:ext uri="{D42A27DB-BD31-4B8C-83A1-F6EECF244321}">
-                <p14:modId xmlns:p14="http://schemas.microsoft.com/office/powerpoint/2010/main" val="1579011935"/>
+                <p14:modId xmlns:p14="http://schemas.microsoft.com/office/powerpoint/2010/main" val="1206001756"/>
               </p:ext>
             </p:extLst>
           </p:nvPr>
         </p:nvGraphicFramePr>
         <p:xfrm>
           <a:off x="548640" y="1143000"/>
-          <a:ext cx="6492240" cy="914400"/>
+          <a:ext cx="6492240" cy="2633472"/>
         </p:xfrm>
         <a:graphic>
           <a:graphicData uri="http://schemas.openxmlformats.org/drawingml/2006/table">
             <a:tbl>
               <a:tblPr/>
               <a:tblGrid>
-                <a:gridCol w="3246120"/>
-                <a:gridCol w="3246120"/>
+                <a:gridCol w="3246120">
+                  <a:extLst>
+                    <a:ext uri="{9D8B030D-6E8A-4147-A177-3AD203B41FA5}">
+                      <a16:colId xmlns:a16="http://schemas.microsoft.com/office/drawing/2014/main" val="20000"/>
+                    </a:ext>
+                  </a:extLst>
+                </a:gridCol>
+                <a:gridCol w="3246120">
+                  <a:extLst>
+                    <a:ext uri="{9D8B030D-6E8A-4147-A177-3AD203B41FA5}">
+                      <a16:colId xmlns:a16="http://schemas.microsoft.com/office/drawing/2014/main" val="20001"/>
+                    </a:ext>
+                  </a:extLst>
+                </a:gridCol>
               </a:tblGrid>
               <a:tr h="438912">
                 <a:tc>
@@ -8018,7 +7823,7 @@
                     <a:bodyPr/>
                     <a:lstStyle/>
                     <a:p>
-                      <a:pPr indent="0" marL="0">
+                      <a:pPr marL="0" indent="0">
                         <a:buNone/>
                       </a:pPr>
                       <a:r>
@@ -8032,7 +7837,7 @@
                       <a:endParaRPr lang="en-US" sz="1400" dirty="0"/>
                     </a:p>
                   </a:txBody>
-                  <a:tcPr marL="91440" marR="91440" marT="45720" marB="45720">
+                  <a:tcPr>
                     <a:lnL w="12700" cap="flat" cmpd="sng" algn="ctr">
                       <a:solidFill>
                         <a:srgbClr val="E0E0D8"/>
@@ -8079,7 +7884,7 @@
                     <a:bodyPr/>
                     <a:lstStyle/>
                     <a:p>
-                      <a:pPr indent="0" marL="0">
+                      <a:pPr marL="0" indent="0">
                         <a:buNone/>
                       </a:pPr>
                       <a:r>
@@ -8093,7 +7898,7 @@
                       <a:endParaRPr lang="en-US" sz="1400" dirty="0"/>
                     </a:p>
                   </a:txBody>
-                  <a:tcPr marL="91440" marR="91440" marT="45720" marB="45720">
+                  <a:tcPr>
                     <a:lnL w="12700" cap="flat" cmpd="sng" algn="ctr">
                       <a:solidFill>
                         <a:srgbClr val="E0E0D8"/>
@@ -8135,6 +7940,11 @@
                     </a:solidFill>
                   </a:tcPr>
                 </a:tc>
+                <a:extLst>
+                  <a:ext uri="{0D108BD9-81ED-4DB2-BD59-A6C34878D82A}">
+                    <a16:rowId xmlns:a16="http://schemas.microsoft.com/office/drawing/2014/main" val="10000"/>
+                  </a:ext>
+                </a:extLst>
               </a:tr>
               <a:tr h="438912">
                 <a:tc>
@@ -8142,7 +7952,7 @@
                     <a:bodyPr/>
                     <a:lstStyle/>
                     <a:p>
-                      <a:pPr indent="0" marL="0">
+                      <a:pPr marL="0" indent="0">
                         <a:buNone/>
                       </a:pPr>
                       <a:r>
@@ -8156,7 +7966,7 @@
                       <a:endParaRPr lang="en-US" sz="1400" dirty="0"/>
                     </a:p>
                   </a:txBody>
-                  <a:tcPr marL="91440" marR="91440" marT="45720" marB="45720">
+                  <a:tcPr>
                     <a:lnL w="12700" cap="flat" cmpd="sng" algn="ctr">
                       <a:solidFill>
                         <a:srgbClr val="E0E0D8"/>
@@ -8200,7 +8010,7 @@
                     <a:bodyPr/>
                     <a:lstStyle/>
                     <a:p>
-                      <a:pPr indent="0" marL="0">
+                      <a:pPr marL="0" indent="0">
                         <a:buNone/>
                       </a:pPr>
                       <a:r>
@@ -8214,7 +8024,7 @@
                       <a:endParaRPr lang="en-US" sz="1400" dirty="0"/>
                     </a:p>
                   </a:txBody>
-                  <a:tcPr marL="91440" marR="91440" marT="45720" marB="45720">
+                  <a:tcPr>
                     <a:lnL w="12700" cap="flat" cmpd="sng" algn="ctr">
                       <a:solidFill>
                         <a:srgbClr val="E0E0D8"/>
@@ -8253,6 +8063,11 @@
                     </a:lnB>
                   </a:tcPr>
                 </a:tc>
+                <a:extLst>
+                  <a:ext uri="{0D108BD9-81ED-4DB2-BD59-A6C34878D82A}">
+                    <a16:rowId xmlns:a16="http://schemas.microsoft.com/office/drawing/2014/main" val="10001"/>
+                  </a:ext>
+                </a:extLst>
               </a:tr>
               <a:tr h="438912">
                 <a:tc>
@@ -8260,7 +8075,7 @@
                     <a:bodyPr/>
                     <a:lstStyle/>
                     <a:p>
-                      <a:pPr indent="0" marL="0">
+                      <a:pPr marL="0" indent="0">
                         <a:buNone/>
                       </a:pPr>
                       <a:r>
@@ -8274,7 +8089,7 @@
                       <a:endParaRPr lang="en-US" sz="1400" dirty="0"/>
                     </a:p>
                   </a:txBody>
-                  <a:tcPr marL="91440" marR="91440" marT="45720" marB="45720">
+                  <a:tcPr>
                     <a:lnL w="12700" cap="flat" cmpd="sng" algn="ctr">
                       <a:solidFill>
                         <a:srgbClr val="E0E0D8"/>
@@ -8318,7 +8133,7 @@
                     <a:bodyPr/>
                     <a:lstStyle/>
                     <a:p>
-                      <a:pPr indent="0" marL="0">
+                      <a:pPr marL="0" indent="0">
                         <a:buNone/>
                       </a:pPr>
                       <a:r>
@@ -8332,7 +8147,7 @@
                       <a:endParaRPr lang="en-US" sz="1400" dirty="0"/>
                     </a:p>
                   </a:txBody>
-                  <a:tcPr marL="91440" marR="91440" marT="45720" marB="45720">
+                  <a:tcPr>
                     <a:lnL w="12700" cap="flat" cmpd="sng" algn="ctr">
                       <a:solidFill>
                         <a:srgbClr val="E0E0D8"/>
@@ -8371,6 +8186,11 @@
                     </a:lnB>
                   </a:tcPr>
                 </a:tc>
+                <a:extLst>
+                  <a:ext uri="{0D108BD9-81ED-4DB2-BD59-A6C34878D82A}">
+                    <a16:rowId xmlns:a16="http://schemas.microsoft.com/office/drawing/2014/main" val="10002"/>
+                  </a:ext>
+                </a:extLst>
               </a:tr>
               <a:tr h="438912">
                 <a:tc>
@@ -8378,7 +8198,7 @@
                     <a:bodyPr/>
                     <a:lstStyle/>
                     <a:p>
-                      <a:pPr indent="0" marL="0">
+                      <a:pPr marL="0" indent="0">
                         <a:buNone/>
                       </a:pPr>
                       <a:r>
@@ -8392,7 +8212,7 @@
                       <a:endParaRPr lang="en-US" sz="1400" dirty="0"/>
                     </a:p>
                   </a:txBody>
-                  <a:tcPr marL="91440" marR="91440" marT="45720" marB="45720">
+                  <a:tcPr>
                     <a:lnL w="12700" cap="flat" cmpd="sng" algn="ctr">
                       <a:solidFill>
                         <a:srgbClr val="E0E0D8"/>
@@ -8436,7 +8256,7 @@
                     <a:bodyPr/>
                     <a:lstStyle/>
                     <a:p>
-                      <a:pPr indent="0" marL="0">
+                      <a:pPr marL="0" indent="0">
                         <a:buNone/>
                       </a:pPr>
                       <a:r>
@@ -8445,12 +8265,44 @@
                             <a:srgbClr val="000000"/>
                           </a:solidFill>
                         </a:rPr>
-                        <a:t>Median-impute — học từ train</a:t>
+                        <a:t>Median-impute (</a:t>
+                      </a:r>
+                      <a:r>
+                        <a:rPr lang="en-US" sz="1400" dirty="0" err="1">
+                          <a:solidFill>
+                            <a:srgbClr val="000000"/>
+                          </a:solidFill>
+                        </a:rPr>
+                        <a:t>học</a:t>
+                      </a:r>
+                      <a:r>
+                        <a:rPr lang="en-US" sz="1400" dirty="0">
+                          <a:solidFill>
+                            <a:srgbClr val="000000"/>
+                          </a:solidFill>
+                        </a:rPr>
+                        <a:t> </a:t>
+                      </a:r>
+                      <a:r>
+                        <a:rPr lang="en-US" sz="1400" dirty="0" err="1">
+                          <a:solidFill>
+                            <a:srgbClr val="000000"/>
+                          </a:solidFill>
+                        </a:rPr>
+                        <a:t>từ</a:t>
+                      </a:r>
+                      <a:r>
+                        <a:rPr lang="en-US" sz="1400" dirty="0">
+                          <a:solidFill>
+                            <a:srgbClr val="000000"/>
+                          </a:solidFill>
+                        </a:rPr>
+                        <a:t> train)</a:t>
                       </a:r>
                       <a:endParaRPr lang="en-US" sz="1400" dirty="0"/>
                     </a:p>
                   </a:txBody>
-                  <a:tcPr marL="91440" marR="91440" marT="45720" marB="45720">
+                  <a:tcPr>
                     <a:lnL w="12700" cap="flat" cmpd="sng" algn="ctr">
                       <a:solidFill>
                         <a:srgbClr val="E0E0D8"/>
@@ -8489,6 +8341,11 @@
                     </a:lnB>
                   </a:tcPr>
                 </a:tc>
+                <a:extLst>
+                  <a:ext uri="{0D108BD9-81ED-4DB2-BD59-A6C34878D82A}">
+                    <a16:rowId xmlns:a16="http://schemas.microsoft.com/office/drawing/2014/main" val="10003"/>
+                  </a:ext>
+                </a:extLst>
               </a:tr>
               <a:tr h="438912">
                 <a:tc>
@@ -8496,7 +8353,7 @@
                     <a:bodyPr/>
                     <a:lstStyle/>
                     <a:p>
-                      <a:pPr indent="0" marL="0">
+                      <a:pPr marL="0" indent="0">
                         <a:buNone/>
                       </a:pPr>
                       <a:r>
@@ -8510,7 +8367,7 @@
                       <a:endParaRPr lang="en-US" sz="1400" dirty="0"/>
                     </a:p>
                   </a:txBody>
-                  <a:tcPr marL="91440" marR="91440" marT="45720" marB="45720">
+                  <a:tcPr>
                     <a:lnL w="12700" cap="flat" cmpd="sng" algn="ctr">
                       <a:solidFill>
                         <a:srgbClr val="E0E0D8"/>
@@ -8554,7 +8411,7 @@
                     <a:bodyPr/>
                     <a:lstStyle/>
                     <a:p>
-                      <a:pPr indent="0" marL="0">
+                      <a:pPr marL="0" indent="0">
                         <a:buNone/>
                       </a:pPr>
                       <a:r>
@@ -8568,7 +8425,7 @@
                       <a:endParaRPr lang="en-US" sz="1400" dirty="0"/>
                     </a:p>
                   </a:txBody>
-                  <a:tcPr marL="91440" marR="91440" marT="45720" marB="45720">
+                  <a:tcPr>
                     <a:lnL w="12700" cap="flat" cmpd="sng" algn="ctr">
                       <a:solidFill>
                         <a:srgbClr val="E0E0D8"/>
@@ -8607,6 +8464,11 @@
                     </a:lnB>
                   </a:tcPr>
                 </a:tc>
+                <a:extLst>
+                  <a:ext uri="{0D108BD9-81ED-4DB2-BD59-A6C34878D82A}">
+                    <a16:rowId xmlns:a16="http://schemas.microsoft.com/office/drawing/2014/main" val="10004"/>
+                  </a:ext>
+                </a:extLst>
               </a:tr>
               <a:tr h="438912">
                 <a:tc>
@@ -8614,7 +8476,7 @@
                     <a:bodyPr/>
                     <a:lstStyle/>
                     <a:p>
-                      <a:pPr indent="0" marL="0">
+                      <a:pPr marL="0" indent="0">
                         <a:buNone/>
                       </a:pPr>
                       <a:r>
@@ -8628,7 +8490,7 @@
                       <a:endParaRPr lang="en-US" sz="1400" dirty="0"/>
                     </a:p>
                   </a:txBody>
-                  <a:tcPr marL="91440" marR="91440" marT="45720" marB="45720">
+                  <a:tcPr>
                     <a:lnL w="12700" cap="flat" cmpd="sng" algn="ctr">
                       <a:solidFill>
                         <a:srgbClr val="E0E0D8"/>
@@ -8672,21 +8534,61 @@
                     <a:bodyPr/>
                     <a:lstStyle/>
                     <a:p>
-                      <a:pPr indent="0" marL="0">
+                      <a:pPr marL="0" indent="0">
                         <a:buNone/>
                       </a:pPr>
+                      <a:r>
+                        <a:rPr lang="en-US" sz="1400" dirty="0" err="1">
+                          <a:solidFill>
+                            <a:srgbClr val="000000"/>
+                          </a:solidFill>
+                        </a:rPr>
+                        <a:t>StandardScaler</a:t>
+                      </a:r>
                       <a:r>
                         <a:rPr lang="en-US" sz="1400" dirty="0">
                           <a:solidFill>
                             <a:srgbClr val="000000"/>
                           </a:solidFill>
                         </a:rPr>
-                        <a:t>StandardScaler — học từ train</a:t>
+                        <a:t> (</a:t>
+                      </a:r>
+                      <a:r>
+                        <a:rPr lang="en-US" sz="1400" dirty="0" err="1">
+                          <a:solidFill>
+                            <a:srgbClr val="000000"/>
+                          </a:solidFill>
+                        </a:rPr>
+                        <a:t>học</a:t>
+                      </a:r>
+                      <a:r>
+                        <a:rPr lang="en-US" sz="1400" dirty="0">
+                          <a:solidFill>
+                            <a:srgbClr val="000000"/>
+                          </a:solidFill>
+                        </a:rPr>
+                        <a:t> </a:t>
+                      </a:r>
+                      <a:r>
+                        <a:rPr lang="en-US" sz="1400" dirty="0" err="1">
+                          <a:solidFill>
+                            <a:srgbClr val="000000"/>
+                          </a:solidFill>
+                        </a:rPr>
+                        <a:t>từ</a:t>
+                      </a:r>
+                      <a:r>
+                        <a:rPr lang="en-US" sz="1400">
+                          <a:solidFill>
+                            <a:srgbClr val="000000"/>
+                          </a:solidFill>
+                        </a:rPr>
+                        <a:t> train)</a:t>
                       </a:r>
                       <a:endParaRPr lang="en-US" sz="1400" dirty="0"/>
                     </a:p>
                   </a:txBody>
-                  <a:tcPr marL="91440" marR="91440" marT="45720" marB="45720">
+                  <a:tcPr>
                     <a:lnL w="12700" cap="flat" cmpd="sng" algn="ctr">
                       <a:solidFill>
                         <a:srgbClr val="E0E0D8"/>
@@ -8725,6 +8627,11 @@
                     </a:lnB>
                   </a:tcPr>
                 </a:tc>
+                <a:extLst>
+                  <a:ext uri="{0D108BD9-81ED-4DB2-BD59-A6C34878D82A}">
+                    <a16:rowId xmlns:a16="http://schemas.microsoft.com/office/drawing/2014/main" val="10005"/>
+                  </a:ext>
+                </a:extLst>
               </a:tr>
             </a:tbl>
           </a:graphicData>
@@ -8778,7 +8685,7 @@
           <a:bodyPr wrap="square" rtlCol="0" anchor="ctr"/>
           <a:lstStyle/>
           <a:p>
-            <a:pPr algn="ctr" indent="0" marL="0">
+            <a:pPr marL="0" indent="0" algn="ctr">
               <a:buNone/>
             </a:pPr>
             <a:r>
@@ -8790,9 +8697,6 @@
               <a:t>Kiểm chứng không rò rỉ
 </a:t>
             </a:r>
-            <a:pPr algn="ctr" indent="0" marL="0">
-              <a:buNone/>
-            </a:pPr>
             <a:r>
               <a:rPr lang="en-US" sz="2800" b="1" dirty="0">
                 <a:solidFill>
@@ -8802,9 +8706,6 @@
               <a:t>PASSED
 </a:t>
             </a:r>
-            <a:pPr algn="ctr" indent="0" marL="0">
-              <a:buNone/>
-            </a:pPr>
             <a:r>
               <a:rPr lang="en-US" sz="1250" dirty="0">
                 <a:solidFill>
@@ -8819,7 +8720,7 @@
       </p:sp>
       <p:sp>
         <p:nvSpPr>
-          <p:cNvPr id="8" name="Shape 5"/>
+          <p:cNvPr id="5" name="Shape 5"/>
           <p:cNvSpPr/>
           <p:nvPr/>
         </p:nvSpPr>
@@ -8865,7 +8766,7 @@
           <a:bodyPr wrap="square" rtlCol="0" anchor="ctr"/>
           <a:lstStyle/>
           <a:p>
-            <a:pPr algn="ctr" indent="0" marL="0">
+            <a:pPr marL="0" indent="0" algn="ctr">
               <a:buNone/>
             </a:pPr>
             <a:r>
@@ -8877,9 +8778,6 @@
               <a:t>205
 </a:t>
             </a:r>
-            <a:pPr algn="ctr" indent="0" marL="0">
-              <a:buNone/>
-            </a:pPr>
             <a:r>
               <a:rPr lang="en-US" sz="1300" dirty="0">
                 <a:solidFill>
@@ -8891,7 +8789,7 @@
             <a:endParaRPr lang="en-US" sz="3200" dirty="0"/>
           </a:p>
           <a:p>
-            <a:pPr algn="ctr" indent="0" marL="0">
+            <a:pPr marL="0" indent="0" algn="ctr">
               <a:buNone/>
             </a:pPr>
             <a:r>
@@ -8927,7 +8825,7 @@
           <a:bodyPr wrap="square" rtlCol="0" anchor="ctr"/>
           <a:lstStyle/>
           <a:p>
-            <a:pPr algn="r" indent="0" marL="0">
+            <a:pPr marL="0" indent="0" algn="r">
               <a:buNone/>
             </a:pPr>
             <a:r>
@@ -8958,6 +8856,7 @@
         <a:solidFill>
           <a:srgbClr val="FBF7EE"/>
         </a:solidFill>
+        <a:effectLst/>
       </p:bgPr>
     </p:bg>
     <p:spTree>
@@ -9015,7 +8914,7 @@
           <a:bodyPr wrap="square" rtlCol="0" anchor="ctr"/>
           <a:lstStyle/>
           <a:p>
-            <a:pPr indent="0" marL="0">
+            <a:pPr marL="0" indent="0">
               <a:buNone/>
             </a:pPr>
             <a:r>
@@ -9055,14 +8954,14 @@
       </p:sp>
       <p:pic>
         <p:nvPicPr>
-          <p:cNvPr id="5" name="Image 0" descr="poster_assets/rmsle_compare.png">    </p:cNvPr>
+          <p:cNvPr id="5" name="Image 0" descr="poster_assets/rmsle_compare.png"/>
           <p:cNvPicPr>
             <a:picLocks noChangeAspect="1"/>
           </p:cNvPicPr>
           <p:nvPr/>
         </p:nvPicPr>
         <p:blipFill>
-          <a:blip r:embed="rId1"/>
+          <a:blip r:embed="rId3"/>
           <a:stretch>
             <a:fillRect/>
           </a:stretch>
@@ -9093,15 +8992,27 @@
         </p:nvGraphicFramePr>
         <p:xfrm>
           <a:off x="6675120" y="1280160"/>
-          <a:ext cx="5029200" cy="914400"/>
+          <a:ext cx="5029200" cy="3017520"/>
         </p:xfrm>
         <a:graphic>
           <a:graphicData uri="http://schemas.openxmlformats.org/drawingml/2006/table">
             <a:tbl>
               <a:tblPr/>
               <a:tblGrid>
-                <a:gridCol w="2514600"/>
-                <a:gridCol w="2514600"/>
+                <a:gridCol w="2514600">
+                  <a:extLst>
+                    <a:ext uri="{9D8B030D-6E8A-4147-A177-3AD203B41FA5}">
+                      <a16:colId xmlns:a16="http://schemas.microsoft.com/office/drawing/2014/main" val="20000"/>
+                    </a:ext>
+                  </a:extLst>
+                </a:gridCol>
+                <a:gridCol w="2514600">
+                  <a:extLst>
+                    <a:ext uri="{9D8B030D-6E8A-4147-A177-3AD203B41FA5}">
+                      <a16:colId xmlns:a16="http://schemas.microsoft.com/office/drawing/2014/main" val="20001"/>
+                    </a:ext>
+                  </a:extLst>
+                </a:gridCol>
               </a:tblGrid>
               <a:tr h="502920">
                 <a:tc>
@@ -9109,7 +9020,7 @@
                     <a:bodyPr/>
                     <a:lstStyle/>
                     <a:p>
-                      <a:pPr indent="0" marL="0">
+                      <a:pPr marL="0" indent="0">
                         <a:buNone/>
                       </a:pPr>
                       <a:r>
@@ -9123,7 +9034,7 @@
                       <a:endParaRPr lang="en-US" sz="1500" dirty="0"/>
                     </a:p>
                   </a:txBody>
-                  <a:tcPr marL="91440" marR="91440" marT="45720" marB="45720">
+                  <a:tcPr>
                     <a:lnL w="12700" cap="flat" cmpd="sng" algn="ctr">
                       <a:solidFill>
                         <a:srgbClr val="E0E0D8"/>
@@ -9170,7 +9081,7 @@
                     <a:bodyPr/>
                     <a:lstStyle/>
                     <a:p>
-                      <a:pPr indent="0" marL="0">
+                      <a:pPr marL="0" indent="0">
                         <a:buNone/>
                       </a:pPr>
                       <a:r>
@@ -9184,7 +9095,7 @@
                       <a:endParaRPr lang="en-US" sz="1500" dirty="0"/>
                     </a:p>
                   </a:txBody>
-                  <a:tcPr marL="91440" marR="91440" marT="45720" marB="45720">
+                  <a:tcPr>
                     <a:lnL w="12700" cap="flat" cmpd="sng" algn="ctr">
                       <a:solidFill>
                         <a:srgbClr val="E0E0D8"/>
@@ -9226,6 +9137,11 @@
                     </a:solidFill>
                   </a:tcPr>
                 </a:tc>
+                <a:extLst>
+                  <a:ext uri="{0D108BD9-81ED-4DB2-BD59-A6C34878D82A}">
+                    <a16:rowId xmlns:a16="http://schemas.microsoft.com/office/drawing/2014/main" val="10000"/>
+                  </a:ext>
+                </a:extLst>
               </a:tr>
               <a:tr h="502920">
                 <a:tc>
@@ -9233,7 +9149,7 @@
                     <a:bodyPr/>
                     <a:lstStyle/>
                     <a:p>
-                      <a:pPr indent="0" marL="0">
+                      <a:pPr marL="0" indent="0">
                         <a:buNone/>
                       </a:pPr>
                       <a:r>
@@ -9247,7 +9163,7 @@
                       <a:endParaRPr lang="en-US" sz="1500" dirty="0"/>
                     </a:p>
                   </a:txBody>
-                  <a:tcPr marL="91440" marR="91440" marT="45720" marB="45720">
+                  <a:tcPr>
                     <a:lnL w="12700" cap="flat" cmpd="sng" algn="ctr">
                       <a:solidFill>
                         <a:srgbClr val="E0E0D8"/>
@@ -9291,7 +9207,7 @@
                     <a:bodyPr/>
                     <a:lstStyle/>
                     <a:p>
-                      <a:pPr indent="0" marL="0">
+                      <a:pPr marL="0" indent="0">
                         <a:buNone/>
                       </a:pPr>
                       <a:r>
@@ -9305,7 +9221,7 @@
                       <a:endParaRPr lang="en-US" sz="1500" dirty="0"/>
                     </a:p>
                   </a:txBody>
-                  <a:tcPr marL="91440" marR="91440" marT="45720" marB="45720">
+                  <a:tcPr>
                     <a:lnL w="12700" cap="flat" cmpd="sng" algn="ctr">
                       <a:solidFill>
                         <a:srgbClr val="E0E0D8"/>
@@ -9344,6 +9260,11 @@
                     </a:lnB>
                   </a:tcPr>
                 </a:tc>
+                <a:extLst>
+                  <a:ext uri="{0D108BD9-81ED-4DB2-BD59-A6C34878D82A}">
+                    <a16:rowId xmlns:a16="http://schemas.microsoft.com/office/drawing/2014/main" val="10001"/>
+                  </a:ext>
+                </a:extLst>
               </a:tr>
               <a:tr h="502920">
                 <a:tc>
@@ -9351,7 +9272,7 @@
                     <a:bodyPr/>
                     <a:lstStyle/>
                     <a:p>
-                      <a:pPr indent="0" marL="0">
+                      <a:pPr marL="0" indent="0">
                         <a:buNone/>
                       </a:pPr>
                       <a:r>
@@ -9365,7 +9286,7 @@
                       <a:endParaRPr lang="en-US" sz="1500" dirty="0"/>
                     </a:p>
                   </a:txBody>
-                  <a:tcPr marL="91440" marR="91440" marT="45720" marB="45720">
+                  <a:tcPr>
                     <a:lnL w="12700" cap="flat" cmpd="sng" algn="ctr">
                       <a:solidFill>
                         <a:srgbClr val="E0E0D8"/>
@@ -9409,7 +9330,7 @@
                     <a:bodyPr/>
                     <a:lstStyle/>
                     <a:p>
-                      <a:pPr indent="0" marL="0">
+                      <a:pPr marL="0" indent="0">
                         <a:buNone/>
                       </a:pPr>
                       <a:r>
@@ -9423,7 +9344,7 @@
                       <a:endParaRPr lang="en-US" sz="1500" dirty="0"/>
                     </a:p>
                   </a:txBody>
-                  <a:tcPr marL="91440" marR="91440" marT="45720" marB="45720">
+                  <a:tcPr>
                     <a:lnL w="12700" cap="flat" cmpd="sng" algn="ctr">
                       <a:solidFill>
                         <a:srgbClr val="E0E0D8"/>
@@ -9462,6 +9383,11 @@
                     </a:lnB>
                   </a:tcPr>
                 </a:tc>
+                <a:extLst>
+                  <a:ext uri="{0D108BD9-81ED-4DB2-BD59-A6C34878D82A}">
+                    <a16:rowId xmlns:a16="http://schemas.microsoft.com/office/drawing/2014/main" val="10002"/>
+                  </a:ext>
+                </a:extLst>
               </a:tr>
               <a:tr h="502920">
                 <a:tc>
@@ -9469,7 +9395,7 @@
                     <a:bodyPr/>
                     <a:lstStyle/>
                     <a:p>
-                      <a:pPr indent="0" marL="0">
+                      <a:pPr marL="0" indent="0">
                         <a:buNone/>
                       </a:pPr>
                       <a:r>
@@ -9483,7 +9409,7 @@
                       <a:endParaRPr lang="en-US" sz="1500" dirty="0"/>
                     </a:p>
                   </a:txBody>
-                  <a:tcPr marL="91440" marR="91440" marT="45720" marB="45720">
+                  <a:tcPr>
                     <a:lnL w="12700" cap="flat" cmpd="sng" algn="ctr">
                       <a:solidFill>
                         <a:srgbClr val="E0E0D8"/>
@@ -9527,7 +9453,7 @@
                     <a:bodyPr/>
                     <a:lstStyle/>
                     <a:p>
-                      <a:pPr indent="0" marL="0">
+                      <a:pPr marL="0" indent="0">
                         <a:buNone/>
                       </a:pPr>
                       <a:r>
@@ -9541,7 +9467,7 @@
                       <a:endParaRPr lang="en-US" sz="1500" dirty="0"/>
                     </a:p>
                   </a:txBody>
-                  <a:tcPr marL="91440" marR="91440" marT="45720" marB="45720">
+                  <a:tcPr>
                     <a:lnL w="12700" cap="flat" cmpd="sng" algn="ctr">
                       <a:solidFill>
                         <a:srgbClr val="E0E0D8"/>
@@ -9580,6 +9506,11 @@
                     </a:lnB>
                   </a:tcPr>
                 </a:tc>
+                <a:extLst>
+                  <a:ext uri="{0D108BD9-81ED-4DB2-BD59-A6C34878D82A}">
+                    <a16:rowId xmlns:a16="http://schemas.microsoft.com/office/drawing/2014/main" val="10003"/>
+                  </a:ext>
+                </a:extLst>
               </a:tr>
               <a:tr h="502920">
                 <a:tc>
@@ -9587,7 +9518,7 @@
                     <a:bodyPr/>
                     <a:lstStyle/>
                     <a:p>
-                      <a:pPr indent="0" marL="0">
+                      <a:pPr marL="0" indent="0">
                         <a:buNone/>
                       </a:pPr>
                       <a:r>
@@ -9601,7 +9532,7 @@
                       <a:endParaRPr lang="en-US" sz="1500" dirty="0"/>
                     </a:p>
                   </a:txBody>
-                  <a:tcPr marL="91440" marR="91440" marT="45720" marB="45720">
+                  <a:tcPr>
                     <a:lnL w="12700" cap="flat" cmpd="sng" algn="ctr">
                       <a:solidFill>
                         <a:srgbClr val="E0E0D8"/>
@@ -9645,7 +9576,7 @@
                     <a:bodyPr/>
                     <a:lstStyle/>
                     <a:p>
-                      <a:pPr indent="0" marL="0">
+                      <a:pPr marL="0" indent="0">
                         <a:buNone/>
                       </a:pPr>
                       <a:r>
@@ -9659,7 +9590,7 @@
                       <a:endParaRPr lang="en-US" sz="1500" dirty="0"/>
                     </a:p>
                   </a:txBody>
-                  <a:tcPr marL="91440" marR="91440" marT="45720" marB="45720">
+                  <a:tcPr>
                     <a:lnL w="12700" cap="flat" cmpd="sng" algn="ctr">
                       <a:solidFill>
                         <a:srgbClr val="E0E0D8"/>
@@ -9698,6 +9629,11 @@
                     </a:lnB>
                   </a:tcPr>
                 </a:tc>
+                <a:extLst>
+                  <a:ext uri="{0D108BD9-81ED-4DB2-BD59-A6C34878D82A}">
+                    <a16:rowId xmlns:a16="http://schemas.microsoft.com/office/drawing/2014/main" val="10004"/>
+                  </a:ext>
+                </a:extLst>
               </a:tr>
               <a:tr h="502920">
                 <a:tc>
@@ -9705,7 +9641,7 @@
                     <a:bodyPr/>
                     <a:lstStyle/>
                     <a:p>
-                      <a:pPr indent="0" marL="0">
+                      <a:pPr marL="0" indent="0">
                         <a:buNone/>
                       </a:pPr>
                       <a:r>
@@ -9719,7 +9655,7 @@
                       <a:endParaRPr lang="en-US" sz="1500" dirty="0"/>
                     </a:p>
                   </a:txBody>
-                  <a:tcPr marL="91440" marR="91440" marT="45720" marB="45720">
+                  <a:tcPr>
                     <a:lnL w="12700" cap="flat" cmpd="sng" algn="ctr">
                       <a:solidFill>
                         <a:srgbClr val="E0E0D8"/>
@@ -9763,7 +9699,7 @@
                     <a:bodyPr/>
                     <a:lstStyle/>
                     <a:p>
-                      <a:pPr indent="0" marL="0">
+                      <a:pPr marL="0" indent="0">
                         <a:buNone/>
                       </a:pPr>
                       <a:r>
@@ -9777,7 +9713,7 @@
                       <a:endParaRPr lang="en-US" sz="1500" dirty="0"/>
                     </a:p>
                   </a:txBody>
-                  <a:tcPr marL="91440" marR="91440" marT="45720" marB="45720">
+                  <a:tcPr>
                     <a:lnL w="12700" cap="flat" cmpd="sng" algn="ctr">
                       <a:solidFill>
                         <a:srgbClr val="E0E0D8"/>
@@ -9816,6 +9752,11 @@
                     </a:lnB>
                   </a:tcPr>
                 </a:tc>
+                <a:extLst>
+                  <a:ext uri="{0D108BD9-81ED-4DB2-BD59-A6C34878D82A}">
+                    <a16:rowId xmlns:a16="http://schemas.microsoft.com/office/drawing/2014/main" val="10005"/>
+                  </a:ext>
+                </a:extLst>
               </a:tr>
             </a:tbl>
           </a:graphicData>
@@ -9842,7 +9783,7 @@
           <a:bodyPr wrap="square" rtlCol="0" anchor="ctr"/>
           <a:lstStyle/>
           <a:p>
-            <a:pPr indent="0" marL="0">
+            <a:pPr marL="0" indent="0">
               <a:buNone/>
             </a:pPr>
             <a:r>
@@ -9878,7 +9819,7 @@
           <a:bodyPr wrap="square" rtlCol="0" anchor="ctr"/>
           <a:lstStyle/>
           <a:p>
-            <a:pPr indent="0" marL="0">
+            <a:pPr marL="0" indent="0">
               <a:lnSpc>
                 <a:spcPct val="120000"/>
               </a:lnSpc>
@@ -9898,7 +9839,7 @@
       </p:sp>
       <p:sp>
         <p:nvSpPr>
-          <p:cNvPr id="9" name="Text 5"/>
+          <p:cNvPr id="6" name="Text 5"/>
           <p:cNvSpPr txBox="1"/>
           <p:nvPr/>
         </p:nvSpPr>
@@ -9917,7 +9858,7 @@
           <a:bodyPr wrap="square" rtlCol="0" anchor="ctr"/>
           <a:lstStyle/>
           <a:p>
-            <a:pPr algn="r" indent="0" marL="0">
+            <a:pPr marL="0" indent="0" algn="r">
               <a:buNone/>
             </a:pPr>
             <a:r>
@@ -9948,6 +9889,7 @@
         <a:solidFill>
           <a:srgbClr val="FBF7EE"/>
         </a:solidFill>
+        <a:effectLst/>
       </p:bgPr>
     </p:bg>
     <p:spTree>
@@ -10005,7 +9947,7 @@
           <a:bodyPr wrap="square" rtlCol="0" anchor="ctr"/>
           <a:lstStyle/>
           <a:p>
-            <a:pPr indent="0" marL="0">
+            <a:pPr marL="0" indent="0">
               <a:buNone/>
             </a:pPr>
             <a:r>
@@ -10064,7 +10006,7 @@
           <a:bodyPr wrap="square" rtlCol="0" anchor="ctr"/>
           <a:lstStyle/>
           <a:p>
-            <a:pPr indent="0" marL="0">
+            <a:pPr marL="0" indent="0">
               <a:buNone/>
             </a:pPr>
             <a:r>
@@ -10127,7 +10069,7 @@
           <a:bodyPr wrap="square" rtlCol="0" anchor="ctr"/>
           <a:lstStyle/>
           <a:p>
-            <a:pPr algn="ctr" indent="0" marL="0">
+            <a:pPr marL="0" indent="0" algn="ctr">
               <a:buNone/>
             </a:pPr>
             <a:r>
@@ -10163,7 +10105,7 @@
           <a:bodyPr wrap="square" rtlCol="0" anchor="ctr"/>
           <a:lstStyle/>
           <a:p>
-            <a:pPr algn="ctr" indent="0" marL="0">
+            <a:pPr marL="0" indent="0" algn="ctr">
               <a:buNone/>
             </a:pPr>
             <a:r>
@@ -10226,7 +10168,7 @@
           <a:bodyPr wrap="square" rtlCol="0" anchor="ctr"/>
           <a:lstStyle/>
           <a:p>
-            <a:pPr algn="ctr" indent="0" marL="0">
+            <a:pPr marL="0" indent="0" algn="ctr">
               <a:buNone/>
             </a:pPr>
             <a:r>
@@ -10262,7 +10204,7 @@
           <a:bodyPr wrap="square" rtlCol="0" anchor="ctr"/>
           <a:lstStyle/>
           <a:p>
-            <a:pPr algn="ctr" indent="0" marL="0">
+            <a:pPr marL="0" indent="0" algn="ctr">
               <a:buNone/>
             </a:pPr>
             <a:r>
@@ -10325,7 +10267,7 @@
           <a:bodyPr wrap="square" rtlCol="0" anchor="ctr"/>
           <a:lstStyle/>
           <a:p>
-            <a:pPr algn="ctr" indent="0" marL="0">
+            <a:pPr marL="0" indent="0" algn="ctr">
               <a:buNone/>
             </a:pPr>
             <a:r>
@@ -10361,7 +10303,7 @@
           <a:bodyPr wrap="square" rtlCol="0" anchor="ctr"/>
           <a:lstStyle/>
           <a:p>
-            <a:pPr algn="ctr" indent="0" marL="0">
+            <a:pPr marL="0" indent="0" algn="ctr">
               <a:buNone/>
             </a:pPr>
             <a:r>
@@ -10397,7 +10339,7 @@
           <a:bodyPr wrap="square" rtlCol="0" anchor="ctr"/>
           <a:lstStyle/>
           <a:p>
-            <a:pPr indent="0" marL="0">
+            <a:pPr marL="0" indent="0">
               <a:lnSpc>
                 <a:spcPct val="120000"/>
               </a:lnSpc>
@@ -10436,7 +10378,7 @@
           <a:bodyPr wrap="square" rtlCol="0" anchor="ctr"/>
           <a:lstStyle/>
           <a:p>
-            <a:pPr indent="0" marL="0">
+            <a:pPr marL="0" indent="0">
               <a:lnSpc>
                 <a:spcPct val="120000"/>
               </a:lnSpc>
@@ -10456,14 +10398,14 @@
       </p:sp>
       <p:pic>
         <p:nvPicPr>
-          <p:cNvPr id="17" name="Image 0" descr="poster_assets/test_scatter.png">    </p:cNvPr>
+          <p:cNvPr id="17" name="Image 0" descr="poster_assets/test_scatter.png"/>
           <p:cNvPicPr>
             <a:picLocks noChangeAspect="1"/>
           </p:cNvPicPr>
           <p:nvPr/>
         </p:nvPicPr>
         <p:blipFill>
-          <a:blip r:embed="rId1"/>
+          <a:blip r:embed="rId3"/>
           <a:stretch>
             <a:fillRect/>
           </a:stretch>
@@ -10499,7 +10441,7 @@
           <a:bodyPr wrap="square" rtlCol="0" anchor="ctr"/>
           <a:lstStyle/>
           <a:p>
-            <a:pPr algn="r" indent="0" marL="0">
+            <a:pPr marL="0" indent="0" algn="r">
               <a:buNone/>
             </a:pPr>
             <a:r>
@@ -10815,4 +10757,299 @@
     </a:ext>
   </a:extLst>
 </a:theme>
+</file>
+
+<file path=ppt/theme/theme2.xml><?xml version="1.0" encoding="utf-8"?>
+<a:theme xmlns:a="http://schemas.openxmlformats.org/drawingml/2006/main" name="Office Theme">
+  <a:themeElements>
+    <a:clrScheme name="Office">
+      <a:dk1>
+        <a:sysClr val="windowText" lastClr="000000"/>
+      </a:dk1>
+      <a:lt1>
+        <a:sysClr val="window" lastClr="FFFFFF"/>
+      </a:lt1>
+      <a:dk2>
+        <a:srgbClr val="44546A"/>
+      </a:dk2>
+      <a:lt2>
+        <a:srgbClr val="E7E6E6"/>
+      </a:lt2>
+      <a:accent1>
+        <a:srgbClr val="4472C4"/>
+      </a:accent1>
+      <a:accent2>
+        <a:srgbClr val="ED7D31"/>
+      </a:accent2>
+      <a:accent3>
+        <a:srgbClr val="A5A5A5"/>
+      </a:accent3>
+      <a:accent4>
+        <a:srgbClr val="FFC000"/>
+      </a:accent4>
+      <a:accent5>
+        <a:srgbClr val="5B9BD5"/>
+      </a:accent5>
+      <a:accent6>
+        <a:srgbClr val="70AD47"/>
+      </a:accent6>
+      <a:hlink>
+        <a:srgbClr val="0563C1"/>
+      </a:hlink>
+      <a:folHlink>
+        <a:srgbClr val="954F72"/>
+      </a:folHlink>
+    </a:clrScheme>
+    <a:fontScheme name="Office">
+      <a:majorFont>
+        <a:latin typeface="Calibri Light" panose="020F0302020204030204"/>
+        <a:ea typeface=""/>
+        <a:cs typeface=""/>
+        <a:font script="Jpan" typeface="游ゴシック Light"/>
+        <a:font script="Hang" typeface="맑은 고딕"/>
+        <a:font script="Hans" typeface="等线 Light"/>
+        <a:font script="Hant" typeface="新細明體"/>
+        <a:font script="Arab" typeface="Times New Roman"/>
+        <a:font script="Hebr" typeface="Times New Roman"/>
+        <a:font script="Thai" typeface="Angsana New"/>
+        <a:font script="Ethi" typeface="Nyala"/>
+        <a:font script="Beng" typeface="Vrinda"/>
+        <a:font script="Gujr" typeface="Shruti"/>
+        <a:font script="Khmr" typeface="MoolBoran"/>
+        <a:font script="Knda" typeface="Tunga"/>
+        <a:font script="Guru" typeface="Raavi"/>
+        <a:font script="Cans" typeface="Euphemia"/>
+        <a:font script="Cher" typeface="Plantagenet Cherokee"/>
+        <a:font script="Yiii" typeface="Microsoft Yi Baiti"/>
+        <a:font script="Tibt" typeface="Microsoft Himalaya"/>
+        <a:font script="Thaa" typeface="MV Boli"/>
+        <a:font script="Deva" typeface="Mangal"/>
+        <a:font script="Telu" typeface="Gautami"/>
+        <a:font script="Taml" typeface="Latha"/>
+        <a:font script="Syrc" typeface="Estrangelo Edessa"/>
+        <a:font script="Orya" typeface="Kalinga"/>
+        <a:font script="Mlym" typeface="Kartika"/>
+        <a:font script="Laoo" typeface="DokChampa"/>
+        <a:font script="Sinh" typeface="Iskoola Pota"/>
+        <a:font script="Mong" typeface="Mongolian Baiti"/>
+        <a:font script="Viet" typeface="Times New Roman"/>
+        <a:font script="Uigh" typeface="Microsoft Uighur"/>
+        <a:font script="Geor" typeface="Sylfaen"/>
+        <a:font script="Armn" typeface="Arial"/>
+        <a:font script="Bugi" typeface="Leelawadee UI"/>
+        <a:font script="Bopo" typeface="Microsoft JhengHei"/>
+        <a:font script="Java" typeface="Javanese Text"/>
+        <a:font script="Lisu" typeface="Segoe UI"/>
+        <a:font script="Mymr" typeface="Myanmar Text"/>
+        <a:font script="Nkoo" typeface="Ebrima"/>
+        <a:font script="Olck" typeface="Nirmala UI"/>
+        <a:font script="Osma" typeface="Ebrima"/>
+        <a:font script="Phag" typeface="Phagspa"/>
+        <a:font script="Syrn" typeface="Estrangelo Edessa"/>
+        <a:font script="Syrj" typeface="Estrangelo Edessa"/>
+        <a:font script="Syre" typeface="Estrangelo Edessa"/>
+        <a:font script="Sora" typeface="Nirmala UI"/>
+        <a:font script="Tale" typeface="Microsoft Tai Le"/>
+        <a:font script="Talu" typeface="Microsoft New Tai Lue"/>
+        <a:font script="Tfng" typeface="Ebrima"/>
+      </a:majorFont>
+      <a:minorFont>
+        <a:latin typeface="Calibri" panose="020F0502020204030204"/>
+        <a:ea typeface=""/>
+        <a:cs typeface=""/>
+        <a:font script="Jpan" typeface="游ゴシック"/>
+        <a:font script="Hang" typeface="맑은 고딕"/>
+        <a:font script="Hans" typeface="等线"/>
+        <a:font script="Hant" typeface="新細明體"/>
+        <a:font script="Arab" typeface="Arial"/>
+        <a:font script="Hebr" typeface="Arial"/>
+        <a:font script="Thai" typeface="Cordia New"/>
+        <a:font script="Ethi" typeface="Nyala"/>
+        <a:font script="Beng" typeface="Vrinda"/>
+        <a:font script="Gujr" typeface="Shruti"/>
+        <a:font script="Khmr" typeface="DaunPenh"/>
+        <a:font script="Knda" typeface="Tunga"/>
+        <a:font script="Guru" typeface="Raavi"/>
+        <a:font script="Cans" typeface="Euphemia"/>
+        <a:font script="Cher" typeface="Plantagenet Cherokee"/>
+        <a:font script="Yiii" typeface="Microsoft Yi Baiti"/>
+        <a:font script="Tibt" typeface="Microsoft Himalaya"/>
+        <a:font script="Thaa" typeface="MV Boli"/>
+        <a:font script="Deva" typeface="Mangal"/>
+        <a:font script="Telu" typeface="Gautami"/>
+        <a:font script="Taml" typeface="Latha"/>
+        <a:font script="Syrc" typeface="Estrangelo Edessa"/>
+        <a:font script="Orya" typeface="Kalinga"/>
+        <a:font script="Mlym" typeface="Kartika"/>
+        <a:font script="Laoo" typeface="DokChampa"/>
+        <a:font script="Sinh" typeface="Iskoola Pota"/>
+        <a:font script="Mong" typeface="Mongolian Baiti"/>
+        <a:font script="Viet" typeface="Arial"/>
+        <a:font script="Uigh" typeface="Microsoft Uighur"/>
+        <a:font script="Geor" typeface="Sylfaen"/>
+        <a:font script="Armn" typeface="Arial"/>
+        <a:font script="Bugi" typeface="Leelawadee UI"/>
+        <a:font script="Bopo" typeface="Microsoft JhengHei"/>
+        <a:font script="Java" typeface="Javanese Text"/>
+        <a:font script="Lisu" typeface="Segoe UI"/>
+        <a:font script="Mymr" typeface="Myanmar Text"/>
+        <a:font script="Nkoo" typeface="Ebrima"/>
+        <a:font script="Olck" typeface="Nirmala UI"/>
+        <a:font script="Osma" typeface="Ebrima"/>
+        <a:font script="Phag" typeface="Phagspa"/>
+        <a:font script="Syrn" typeface="Estrangelo Edessa"/>
+        <a:font script="Syrj" typeface="Estrangelo Edessa"/>
+        <a:font script="Syre" typeface="Estrangelo Edessa"/>
+        <a:font script="Sora" typeface="Nirmala UI"/>
+        <a:font script="Tale" typeface="Microsoft Tai Le"/>
+        <a:font script="Talu" typeface="Microsoft New Tai Lue"/>
+        <a:font script="Tfng" typeface="Ebrima"/>
+      </a:minorFont>
+    </a:fontScheme>
+    <a:fmtScheme name="Office">
+      <a:fillStyleLst>
+        <a:solidFill>
+          <a:schemeClr val="phClr"/>
+        </a:solidFill>
+        <a:gradFill rotWithShape="1">
+          <a:gsLst>
+            <a:gs pos="0">
+              <a:schemeClr val="phClr">
+                <a:lumMod val="110000"/>
+                <a:satMod val="105000"/>
+                <a:tint val="67000"/>
+              </a:schemeClr>
+            </a:gs>
+            <a:gs pos="50000">
+              <a:schemeClr val="phClr">
+                <a:lumMod val="105000"/>
+                <a:satMod val="103000"/>
+                <a:tint val="73000"/>
+              </a:schemeClr>
+            </a:gs>
+            <a:gs pos="100000">
+              <a:schemeClr val="phClr">
+                <a:lumMod val="105000"/>
+                <a:satMod val="109000"/>
+                <a:tint val="81000"/>
+              </a:schemeClr>
+            </a:gs>
+          </a:gsLst>
+          <a:lin ang="5400000" scaled="0"/>
+        </a:gradFill>
+        <a:gradFill rotWithShape="1">
+          <a:gsLst>
+            <a:gs pos="0">
+              <a:schemeClr val="phClr">
+                <a:satMod val="103000"/>
+                <a:lumMod val="102000"/>
+                <a:tint val="94000"/>
+              </a:schemeClr>
+            </a:gs>
+            <a:gs pos="50000">
+              <a:schemeClr val="phClr">
+                <a:satMod val="110000"/>
+                <a:lumMod val="100000"/>
+                <a:shade val="100000"/>
+              </a:schemeClr>
+            </a:gs>
+            <a:gs pos="100000">
+              <a:schemeClr val="phClr">
+                <a:lumMod val="99000"/>
+                <a:satMod val="120000"/>
+                <a:shade val="78000"/>
+              </a:schemeClr>
+            </a:gs>
+          </a:gsLst>
+          <a:lin ang="5400000" scaled="0"/>
+        </a:gradFill>
+      </a:fillStyleLst>
+      <a:lnStyleLst>
+        <a:ln w="6350" cap="flat" cmpd="sng" algn="ctr">
+          <a:solidFill>
+            <a:schemeClr val="phClr"/>
+          </a:solidFill>
+          <a:prstDash val="solid"/>
+          <a:miter lim="800000"/>
+        </a:ln>
+        <a:ln w="12700" cap="flat" cmpd="sng" algn="ctr">
+          <a:solidFill>
+            <a:schemeClr val="phClr"/>
+          </a:solidFill>
+          <a:prstDash val="solid"/>
+          <a:miter lim="800000"/>
+        </a:ln>
+        <a:ln w="19050" cap="flat" cmpd="sng" algn="ctr">
+          <a:solidFill>
+            <a:schemeClr val="phClr"/>
+          </a:solidFill>
+          <a:prstDash val="solid"/>
+          <a:miter lim="800000"/>
+        </a:ln>
+      </a:lnStyleLst>
+      <a:effectStyleLst>
+        <a:effectStyle>
+          <a:effectLst/>
+        </a:effectStyle>
+        <a:effectStyle>
+          <a:effectLst/>
+        </a:effectStyle>
+        <a:effectStyle>
+          <a:effectLst>
+            <a:outerShdw blurRad="57150" dist="19050" dir="5400000" algn="ctr" rotWithShape="0">
+              <a:srgbClr val="000000">
+                <a:alpha val="63000"/>
+              </a:srgbClr>
+            </a:outerShdw>
+          </a:effectLst>
+        </a:effectStyle>
+      </a:effectStyleLst>
+      <a:bgFillStyleLst>
+        <a:solidFill>
+          <a:schemeClr val="phClr"/>
+        </a:solidFill>
+        <a:solidFill>
+          <a:schemeClr val="phClr">
+            <a:tint val="95000"/>
+            <a:satMod val="170000"/>
+          </a:schemeClr>
+        </a:solidFill>
+        <a:gradFill rotWithShape="1">
+          <a:gsLst>
+            <a:gs pos="0">
+              <a:schemeClr val="phClr">
+                <a:tint val="93000"/>
+                <a:satMod val="150000"/>
+                <a:shade val="98000"/>
+                <a:lumMod val="102000"/>
+              </a:schemeClr>
+            </a:gs>
+            <a:gs pos="50000">
+              <a:schemeClr val="phClr">
+                <a:tint val="98000"/>
+                <a:satMod val="130000"/>
+                <a:shade val="90000"/>
+                <a:lumMod val="103000"/>
+              </a:schemeClr>
+            </a:gs>
+            <a:gs pos="100000">
+              <a:schemeClr val="phClr">
+                <a:shade val="63000"/>
+                <a:satMod val="120000"/>
+              </a:schemeClr>
+            </a:gs>
+          </a:gsLst>
+          <a:lin ang="5400000" scaled="0"/>
+        </a:gradFill>
+      </a:bgFillStyleLst>
+    </a:fmtScheme>
+  </a:themeElements>
+  <a:objectDefaults/>
+  <a:extraClrSchemeLst/>
+  <a:extLst>
+    <a:ext uri="{05A4C25C-085E-4340-85A3-A5531E510DB2}">
+      <thm15:themeFamily xmlns:thm15="http://schemas.microsoft.com/office/thememl/2012/main" name="Office Theme" id="{62F939B6-93AF-4DB8-9C6B-D6C7DFDC589F}" vid="{4A3C46E8-61CC-4603-A589-7422A47A8E4A}"/>
+    </a:ext>
+  </a:extLst>
+</a:theme>
 </file>